--- a/スライド/ch02.pptx
+++ b/スライド/ch02.pptx
@@ -920,7 +920,7 @@
           <a:p/>
           <a:p>
             <a:r>
-              <a:t>_class: sections</a:t>
+              <a:t>_class: figure-full</a:t>
             </a:r>
           </a:p>
         </p:txBody>
@@ -990,13 +990,13 @@
           <a:lstStyle/>
           <a:p>
             <a:r>
-              <a:t>段階開示。①で「P を固定すると I は V に反比例」を強調。②の代入は学生に板書させてもよい。③で「なぜ電線を太くする代わりに電圧を上げるのか」に答える。</a:t>
+              <a:t>前の 1 枚に ② を足しただけ。薄い段はまだ出していない段。</a:t>
             </a:r>
           </a:p>
           <a:p/>
           <a:p>
             <a:r>
-              <a:t>_class: sections</a:t>
+              <a:t>_class: figure-full</a:t>
             </a:r>
           </a:p>
         </p:txBody>
@@ -1066,13 +1066,13 @@
           <a:lstStyle/>
           <a:p>
             <a:r>
-              <a:t>段階開示。①で「P を固定すると I は V に反比例」を強調。②の代入は学生に板書させてもよい。③で「なぜ電線を太くする代わりに電圧を上げるのか」に答える。</a:t>
+              <a:t>前の 1 枚に ③ を足しただけ。薄い段はまだ出していない段。</a:t>
             </a:r>
           </a:p>
           <a:p/>
           <a:p>
             <a:r>
-              <a:t>_class: sections</a:t>
+              <a:t>_class: figure-full</a:t>
             </a:r>
           </a:p>
         </p:txBody>
@@ -1750,7 +1750,7 @@
           <a:p/>
           <a:p>
             <a:r>
-              <a:t>_class: sections</a:t>
+              <a:t>_class: figure-full</a:t>
             </a:r>
           </a:p>
         </p:txBody>
@@ -1820,13 +1820,13 @@
           <a:lstStyle/>
           <a:p>
             <a:r>
-              <a:t>段階開示。①は「並列＝同じ電圧差」だけで出る。②で数値。③で「ループは安全か」を問い、N-1 と潮流計算の必要性へ。</a:t>
+              <a:t>前の 1 枚に ② を足しただけ。薄い段はまだ出していない段。</a:t>
             </a:r>
           </a:p>
           <a:p/>
           <a:p>
             <a:r>
-              <a:t>_class: sections</a:t>
+              <a:t>_class: figure-full</a:t>
             </a:r>
           </a:p>
         </p:txBody>
@@ -1896,13 +1896,13 @@
           <a:lstStyle/>
           <a:p>
             <a:r>
-              <a:t>段階開示。①は「並列＝同じ電圧差」だけで出る。②で数値。③で「ループは安全か」を問い、N-1 と潮流計算の必要性へ。</a:t>
+              <a:t>前の 1 枚に ③ を足しただけ。薄い段はまだ出していない段。</a:t>
             </a:r>
           </a:p>
           <a:p/>
           <a:p>
             <a:r>
-              <a:t>_class: sections</a:t>
+              <a:t>_class: figure-full</a:t>
             </a:r>
           </a:p>
         </p:txBody>
@@ -9423,59 +9423,14 @@
       <p:grpSpPr/>
       <p:sp>
         <p:nvSpPr>
-          <p:cNvPr id="2" name="TextBox 1"/>
+          <p:cNvPr id="2" name="edge:title"/>
           <p:cNvSpPr txBox="1"/>
           <p:nvPr/>
         </p:nvSpPr>
         <p:spPr>
           <a:xfrm>
-            <a:off x="566928" y="457200"/>
-            <a:ext cx="11057839" cy="658368"/>
-          </a:xfrm>
-          <a:prstGeom prst="rect">
-            <a:avLst/>
-          </a:prstGeom>
-          <a:noFill/>
-        </p:spPr>
-        <p:txBody>
-          <a:bodyPr wrap="square" lIns="0" rIns="0" tIns="0" bIns="0" anchor="ctr">
-            <a:noAutofit/>
-          </a:bodyPr>
-          <a:lstStyle/>
-          <a:p>
-            <a:pPr>
-              <a:lnSpc>
-                <a:spcPct val="106000"/>
-              </a:lnSpc>
-              <a:defRPr sz="3390" b="1">
-                <a:solidFill>
-                  <a:srgbClr val="7C332A"/>
-                </a:solidFill>
-                <a:latin typeface="Avenir Next"/>
-                <a:ea typeface="Hiragino Sans"/>
-                <a:cs typeface="Hiragino Sans"/>
-              </a:defRPr>
-            </a:pPr>
-            <a:r>
-              <a:rPr>
-                <a:ea typeface="Hiragino Sans"/>
-                <a:cs typeface="Hiragino Sans"/>
-              </a:rPr>
-              <a:t>導出 — 損失は電圧の 2 乗に反比例する</a:t>
-            </a:r>
-          </a:p>
-        </p:txBody>
-      </p:sp>
-      <p:sp>
-        <p:nvSpPr>
-          <p:cNvPr id="3" name="TextBox 2"/>
-          <p:cNvSpPr txBox="1"/>
-          <p:nvPr/>
-        </p:nvSpPr>
-        <p:spPr>
-          <a:xfrm>
-            <a:off x="566928" y="2229993"/>
-            <a:ext cx="11057839" cy="254000"/>
+            <a:off x="566928" y="146304"/>
+            <a:ext cx="11057839" cy="457200"/>
           </a:xfrm>
           <a:prstGeom prst="rect">
             <a:avLst/>
@@ -9488,30 +9443,60 @@
           </a:bodyPr>
           <a:lstStyle/>
           <a:p>
-            <a:r>
-              <a:rPr sz="1600" b="1">
-                <a:solidFill>
-                  <a:srgbClr val="5C7268"/>
-                </a:solidFill>
-                <a:latin typeface="Avenir Next"/>
-                <a:ea typeface="Hiragino Sans"/>
-                <a:cs typeface="Hiragino Sans"/>
-              </a:rPr>
-              <a:t>① 三相電力から電流を出す｜P = √3 V I cosφ</a:t>
-            </a:r>
-          </a:p>
-        </p:txBody>
-      </p:sp>
-      <p:sp>
-        <p:nvSpPr>
-          <p:cNvPr id="4" name="TextBox 3"/>
+            <a:pPr>
+              <a:defRPr sz="2400" b="1">
+                <a:solidFill>
+                  <a:srgbClr val="7C332A"/>
+                </a:solidFill>
+                <a:latin typeface="Avenir Next"/>
+                <a:ea typeface="Hiragino Sans"/>
+                <a:cs typeface="Hiragino Sans"/>
+              </a:defRPr>
+            </a:pPr>
+            <a:r>
+              <a:rPr>
+                <a:ea typeface="Hiragino Sans"/>
+                <a:cs typeface="Hiragino Sans"/>
+              </a:rPr>
+              <a:t>導出 — 損失は電圧の 2 乗に反比例する</a:t>
+            </a:r>
+          </a:p>
+        </p:txBody>
+      </p:sp>
+      <p:pic>
+        <p:nvPicPr>
+          <p:cNvPr id="3" name="Picture 2" descr="ch02_deriv_loss_1.png"/>
+          <p:cNvPicPr>
+            <a:picLocks noChangeAspect="1"/>
+          </p:cNvPicPr>
+          <p:nvPr/>
+        </p:nvPicPr>
+        <p:blipFill>
+          <a:blip r:embed="rId2"/>
+          <a:stretch>
+            <a:fillRect/>
+          </a:stretch>
+        </p:blipFill>
+        <p:spPr>
+          <a:xfrm>
+            <a:off x="539984" y="713232"/>
+            <a:ext cx="11111726" cy="5532120"/>
+          </a:xfrm>
+          <a:prstGeom prst="rect">
+            <a:avLst/>
+          </a:prstGeom>
+        </p:spPr>
+      </p:pic>
+      <p:sp>
+        <p:nvSpPr>
+          <p:cNvPr id="4" name="edge:caption"/>
           <p:cNvSpPr txBox="1"/>
           <p:nvPr/>
         </p:nvSpPr>
         <p:spPr>
           <a:xfrm>
-            <a:off x="822960" y="2522093"/>
-            <a:ext cx="10801807" cy="385762"/>
+            <a:off x="228600" y="6300216"/>
+            <a:ext cx="11734495" cy="310896"/>
           </a:xfrm>
           <a:prstGeom prst="rect">
             <a:avLst/>
@@ -9524,314 +9509,24 @@
           </a:bodyPr>
           <a:lstStyle/>
           <a:p>
-            <a:pPr>
-              <a:lnSpc>
-                <a:spcPct val="130000"/>
-              </a:lnSpc>
-            </a:pPr>
-            <a:r>
-              <a:rPr sz="1500">
-                <a:solidFill>
-                  <a:srgbClr val="33221E"/>
-                </a:solidFill>
-                <a:latin typeface="Avenir Next"/>
-                <a:ea typeface="Hiragino Sans"/>
-                <a:cs typeface="Hiragino Sans"/>
-              </a:rPr>
-              <a:t>送る電力 P と線間電圧 V を決めると電流が決まる：</a:t>
-            </a:r>
-            <a:r>
-              <a:rPr sz="1500" b="1">
-                <a:solidFill>
-                  <a:srgbClr val="33221E"/>
-                </a:solidFill>
-                <a:latin typeface="Avenir Next"/>
-                <a:ea typeface="Hiragino Sans"/>
-                <a:cs typeface="Hiragino Sans"/>
-              </a:rPr>
-              <a:t>I = P/(√3 V cosφ)</a:t>
-            </a:r>
-            <a:r>
-              <a:rPr sz="1500">
-                <a:solidFill>
-                  <a:srgbClr val="33221E"/>
-                </a:solidFill>
-                <a:latin typeface="Avenir Next"/>
-                <a:ea typeface="Hiragino Sans"/>
-                <a:cs typeface="Hiragino Sans"/>
-              </a:rPr>
-              <a:t>。同じ P なら、電流は V に反比例する。</a:t>
-            </a:r>
-          </a:p>
-        </p:txBody>
-      </p:sp>
-      <p:sp>
-        <p:nvSpPr>
-          <p:cNvPr id="5" name="Rectangle 4"/>
-          <p:cNvSpPr/>
-          <p:nvPr/>
-        </p:nvSpPr>
-        <p:spPr>
-          <a:xfrm>
-            <a:off x="566928" y="3059747"/>
-            <a:ext cx="11057839" cy="9525"/>
-          </a:xfrm>
-          <a:prstGeom prst="rect">
-            <a:avLst/>
-          </a:prstGeom>
-          <a:solidFill>
-            <a:srgbClr val="E5DCCE"/>
-          </a:solidFill>
-          <a:ln>
-            <a:noFill/>
-          </a:ln>
-          <a:effectLst/>
-        </p:spPr>
-        <p:style>
-          <a:lnRef idx="1">
-            <a:schemeClr val="accent1"/>
-          </a:lnRef>
-          <a:fillRef idx="3">
-            <a:schemeClr val="accent1"/>
-          </a:fillRef>
-          <a:effectRef idx="2">
-            <a:schemeClr val="accent1"/>
-          </a:effectRef>
-          <a:fontRef idx="minor">
-            <a:schemeClr val="lt1"/>
-          </a:fontRef>
-        </p:style>
-        <p:txBody>
-          <a:bodyPr rtlCol="0" anchor="ctr"/>
-          <a:lstStyle/>
-          <a:p>
             <a:pPr algn="ctr"/>
-          </a:p>
-        </p:txBody>
-      </p:sp>
-      <p:sp>
-        <p:nvSpPr>
-          <p:cNvPr id="6" name="build:ghost"/>
-          <p:cNvSpPr txBox="1"/>
-          <p:nvPr/>
-        </p:nvSpPr>
-        <p:spPr>
-          <a:xfrm>
-            <a:off x="566928" y="3237039"/>
-            <a:ext cx="11057839" cy="254000"/>
-          </a:xfrm>
-          <a:prstGeom prst="rect">
-            <a:avLst/>
-          </a:prstGeom>
-          <a:noFill/>
-        </p:spPr>
-        <p:txBody>
-          <a:bodyPr wrap="none" lIns="0" rIns="0" tIns="0" bIns="0">
-            <a:noAutofit/>
-          </a:bodyPr>
-          <a:lstStyle/>
-          <a:p>
-            <a:r>
-              <a:rPr sz="1600" b="1">
-                <a:solidFill>
-                  <a:srgbClr val="C1C9C5"/>
-                </a:solidFill>
-                <a:latin typeface="Avenir Next"/>
-                <a:ea typeface="Hiragino Sans"/>
-                <a:cs typeface="Hiragino Sans"/>
-              </a:rPr>
-              <a:t>② ジュール損に代入する｜P_loss = 3 I² R（3 相分）</a:t>
-            </a:r>
-          </a:p>
-        </p:txBody>
-      </p:sp>
-      <p:sp>
-        <p:nvSpPr>
-          <p:cNvPr id="7" name="build:ghost"/>
-          <p:cNvSpPr txBox="1"/>
-          <p:nvPr/>
-        </p:nvSpPr>
-        <p:spPr>
-          <a:xfrm>
-            <a:off x="822960" y="3529139"/>
-            <a:ext cx="10801807" cy="385762"/>
-          </a:xfrm>
-          <a:prstGeom prst="rect">
-            <a:avLst/>
-          </a:prstGeom>
-          <a:noFill/>
-        </p:spPr>
-        <p:txBody>
-          <a:bodyPr wrap="square" lIns="0" rIns="0" tIns="0" bIns="0">
-            <a:noAutofit/>
-          </a:bodyPr>
-          <a:lstStyle/>
-          <a:p>
-            <a:pPr>
-              <a:lnSpc>
-                <a:spcPct val="130000"/>
-              </a:lnSpc>
-            </a:pPr>
-            <a:r>
-              <a:rPr sz="1500">
-                <a:solidFill>
-                  <a:srgbClr val="C1BCBB"/>
-                </a:solidFill>
-                <a:latin typeface="Avenir Next"/>
-                <a:ea typeface="Hiragino Sans"/>
-                <a:cs typeface="Hiragino Sans"/>
-              </a:rPr>
-              <a:t>3R × P²/(3 V² cos²φ) = </a:t>
-            </a:r>
-            <a:r>
-              <a:rPr sz="1500" b="1">
-                <a:solidFill>
-                  <a:srgbClr val="C1BCBB"/>
-                </a:solidFill>
-                <a:latin typeface="Avenir Next"/>
-                <a:ea typeface="Hiragino Sans"/>
-                <a:cs typeface="Hiragino Sans"/>
-              </a:rPr>
-              <a:t>R P²/(V² cos²φ)</a:t>
-            </a:r>
-            <a:r>
-              <a:rPr sz="1500">
-                <a:solidFill>
-                  <a:srgbClr val="C1BCBB"/>
-                </a:solidFill>
-                <a:latin typeface="Avenir Next"/>
-                <a:ea typeface="Hiragino Sans"/>
-                <a:cs typeface="Hiragino Sans"/>
-              </a:rPr>
-              <a:t>。3 が消えて、分母に V² と cos²φ が残る。</a:t>
-            </a:r>
-          </a:p>
-        </p:txBody>
-      </p:sp>
-      <p:sp>
-        <p:nvSpPr>
-          <p:cNvPr id="8" name="Rectangle 7"/>
-          <p:cNvSpPr/>
-          <p:nvPr/>
-        </p:nvSpPr>
-        <p:spPr>
-          <a:xfrm>
-            <a:off x="566928" y="4066793"/>
-            <a:ext cx="11057839" cy="9525"/>
-          </a:xfrm>
-          <a:prstGeom prst="rect">
-            <a:avLst/>
-          </a:prstGeom>
-          <a:solidFill>
-            <a:srgbClr val="E5DCCE"/>
-          </a:solidFill>
-          <a:ln>
-            <a:noFill/>
-          </a:ln>
-          <a:effectLst/>
-        </p:spPr>
-        <p:style>
-          <a:lnRef idx="1">
-            <a:schemeClr val="accent1"/>
-          </a:lnRef>
-          <a:fillRef idx="3">
-            <a:schemeClr val="accent1"/>
-          </a:fillRef>
-          <a:effectRef idx="2">
-            <a:schemeClr val="accent1"/>
-          </a:effectRef>
-          <a:fontRef idx="minor">
-            <a:schemeClr val="lt1"/>
-          </a:fontRef>
-        </p:style>
-        <p:txBody>
-          <a:bodyPr rtlCol="0" anchor="ctr"/>
-          <a:lstStyle/>
-          <a:p>
-            <a:pPr algn="ctr"/>
-          </a:p>
-        </p:txBody>
-      </p:sp>
-      <p:sp>
-        <p:nvSpPr>
-          <p:cNvPr id="9" name="build:ghost"/>
-          <p:cNvSpPr txBox="1"/>
-          <p:nvPr/>
-        </p:nvSpPr>
-        <p:spPr>
-          <a:xfrm>
-            <a:off x="566928" y="4244085"/>
-            <a:ext cx="11057839" cy="254000"/>
-          </a:xfrm>
-          <a:prstGeom prst="rect">
-            <a:avLst/>
-          </a:prstGeom>
-          <a:noFill/>
-        </p:spPr>
-        <p:txBody>
-          <a:bodyPr wrap="none" lIns="0" rIns="0" tIns="0" bIns="0">
-            <a:noAutofit/>
-          </a:bodyPr>
-          <a:lstStyle/>
-          <a:p>
-            <a:r>
-              <a:rPr sz="1600" b="1">
-                <a:solidFill>
-                  <a:srgbClr val="C1C9C5"/>
-                </a:solidFill>
-                <a:latin typeface="Avenir Next"/>
-                <a:ea typeface="Hiragino Sans"/>
-                <a:cs typeface="Hiragino Sans"/>
-              </a:rPr>
-              <a:t>③ 読み方｜V を 2 倍にすると損失は 1/4</a:t>
-            </a:r>
-          </a:p>
-        </p:txBody>
-      </p:sp>
-      <p:sp>
-        <p:nvSpPr>
-          <p:cNvPr id="10" name="build:ghost"/>
-          <p:cNvSpPr txBox="1"/>
-          <p:nvPr/>
-        </p:nvSpPr>
-        <p:spPr>
-          <a:xfrm>
-            <a:off x="822960" y="4536185"/>
-            <a:ext cx="10801807" cy="695325"/>
-          </a:xfrm>
-          <a:prstGeom prst="rect">
-            <a:avLst/>
-          </a:prstGeom>
-          <a:noFill/>
-        </p:spPr>
-        <p:txBody>
-          <a:bodyPr wrap="square" lIns="0" rIns="0" tIns="0" bIns="0">
-            <a:noAutofit/>
-          </a:bodyPr>
-          <a:lstStyle/>
-          <a:p>
-            <a:pPr>
-              <a:lnSpc>
-                <a:spcPct val="130000"/>
-              </a:lnSpc>
-            </a:pPr>
-            <a:r>
-              <a:rPr sz="1500">
-                <a:solidFill>
-                  <a:srgbClr val="C1BCBB"/>
-                </a:solidFill>
-                <a:latin typeface="Avenir Next"/>
-                <a:ea typeface="Hiragino Sans"/>
-                <a:cs typeface="Hiragino Sans"/>
-              </a:rPr>
-              <a:t>R は 1 乗（電線を太くしても効きにくい）、V と cosφ は 2 乗。275 → 500 kV で (275/500)² = 0.30 倍、力率 0.8 は 1/0.64 = 1.56 倍。</a:t>
-            </a:r>
-          </a:p>
-        </p:txBody>
-      </p:sp>
-      <p:sp>
-        <p:nvSpPr>
-          <p:cNvPr id="11" name="TextBox 10"/>
+            <a:r>
+              <a:rPr sz="1400">
+                <a:solidFill>
+                  <a:srgbClr val="71635B"/>
+                </a:solidFill>
+                <a:latin typeface="Avenir Next"/>
+                <a:ea typeface="Hiragino Sans"/>
+                <a:cs typeface="Hiragino Sans"/>
+              </a:rPr>
+              <a:t>送る電力 P と線間電圧 V を決めると電流が決まる：I = P/(√3 V cosφ)。同じ P なら、電流は V に反比例する。　出典｜コード/fig_ch02.py</a:t>
+            </a:r>
+          </a:p>
+        </p:txBody>
+      </p:sp>
+      <p:sp>
+        <p:nvSpPr>
+          <p:cNvPr id="5" name="TextBox 4"/>
           <p:cNvSpPr txBox="1"/>
           <p:nvPr/>
         </p:nvSpPr>
@@ -9887,59 +9582,14 @@
       <p:grpSpPr/>
       <p:sp>
         <p:nvSpPr>
-          <p:cNvPr id="2" name="TextBox 1"/>
+          <p:cNvPr id="2" name="edge:title"/>
           <p:cNvSpPr txBox="1"/>
           <p:nvPr/>
         </p:nvSpPr>
         <p:spPr>
           <a:xfrm>
-            <a:off x="566928" y="457200"/>
-            <a:ext cx="11057839" cy="658368"/>
-          </a:xfrm>
-          <a:prstGeom prst="rect">
-            <a:avLst/>
-          </a:prstGeom>
-          <a:noFill/>
-        </p:spPr>
-        <p:txBody>
-          <a:bodyPr wrap="square" lIns="0" rIns="0" tIns="0" bIns="0" anchor="ctr">
-            <a:noAutofit/>
-          </a:bodyPr>
-          <a:lstStyle/>
-          <a:p>
-            <a:pPr>
-              <a:lnSpc>
-                <a:spcPct val="106000"/>
-              </a:lnSpc>
-              <a:defRPr sz="3390" b="1">
-                <a:solidFill>
-                  <a:srgbClr val="7C332A"/>
-                </a:solidFill>
-                <a:latin typeface="Avenir Next"/>
-                <a:ea typeface="Hiragino Sans"/>
-                <a:cs typeface="Hiragino Sans"/>
-              </a:defRPr>
-            </a:pPr>
-            <a:r>
-              <a:rPr>
-                <a:ea typeface="Hiragino Sans"/>
-                <a:cs typeface="Hiragino Sans"/>
-              </a:rPr>
-              <a:t>導出 — 損失は電圧の 2 乗に反比例する</a:t>
-            </a:r>
-          </a:p>
-        </p:txBody>
-      </p:sp>
-      <p:sp>
-        <p:nvSpPr>
-          <p:cNvPr id="3" name="TextBox 2"/>
-          <p:cNvSpPr txBox="1"/>
-          <p:nvPr/>
-        </p:nvSpPr>
-        <p:spPr>
-          <a:xfrm>
-            <a:off x="566928" y="2229993"/>
-            <a:ext cx="11057839" cy="254000"/>
+            <a:off x="566928" y="146304"/>
+            <a:ext cx="11057839" cy="457200"/>
           </a:xfrm>
           <a:prstGeom prst="rect">
             <a:avLst/>
@@ -9952,30 +9602,60 @@
           </a:bodyPr>
           <a:lstStyle/>
           <a:p>
-            <a:r>
-              <a:rPr sz="1600" b="1">
-                <a:solidFill>
-                  <a:srgbClr val="5C7268"/>
-                </a:solidFill>
-                <a:latin typeface="Avenir Next"/>
-                <a:ea typeface="Hiragino Sans"/>
-                <a:cs typeface="Hiragino Sans"/>
-              </a:rPr>
-              <a:t>① 三相電力から電流を出す｜P = √3 V I cosφ</a:t>
-            </a:r>
-          </a:p>
-        </p:txBody>
-      </p:sp>
-      <p:sp>
-        <p:nvSpPr>
-          <p:cNvPr id="4" name="TextBox 3"/>
+            <a:pPr>
+              <a:defRPr sz="2400" b="1">
+                <a:solidFill>
+                  <a:srgbClr val="7C332A"/>
+                </a:solidFill>
+                <a:latin typeface="Avenir Next"/>
+                <a:ea typeface="Hiragino Sans"/>
+                <a:cs typeface="Hiragino Sans"/>
+              </a:defRPr>
+            </a:pPr>
+            <a:r>
+              <a:rPr>
+                <a:ea typeface="Hiragino Sans"/>
+                <a:cs typeface="Hiragino Sans"/>
+              </a:rPr>
+              <a:t>導出 — 損失は電圧の 2 乗に反比例する</a:t>
+            </a:r>
+          </a:p>
+        </p:txBody>
+      </p:sp>
+      <p:pic>
+        <p:nvPicPr>
+          <p:cNvPr id="3" name="Picture 2" descr="ch02_deriv_loss_2.png"/>
+          <p:cNvPicPr>
+            <a:picLocks noChangeAspect="1"/>
+          </p:cNvPicPr>
+          <p:nvPr/>
+        </p:nvPicPr>
+        <p:blipFill>
+          <a:blip r:embed="rId2"/>
+          <a:stretch>
+            <a:fillRect/>
+          </a:stretch>
+        </p:blipFill>
+        <p:spPr>
+          <a:xfrm>
+            <a:off x="539984" y="713232"/>
+            <a:ext cx="11111726" cy="5532120"/>
+          </a:xfrm>
+          <a:prstGeom prst="rect">
+            <a:avLst/>
+          </a:prstGeom>
+        </p:spPr>
+      </p:pic>
+      <p:sp>
+        <p:nvSpPr>
+          <p:cNvPr id="4" name="edge:caption"/>
           <p:cNvSpPr txBox="1"/>
           <p:nvPr/>
         </p:nvSpPr>
         <p:spPr>
           <a:xfrm>
-            <a:off x="822960" y="2522093"/>
-            <a:ext cx="10801807" cy="385762"/>
+            <a:off x="228600" y="6300216"/>
+            <a:ext cx="11734495" cy="310896"/>
           </a:xfrm>
           <a:prstGeom prst="rect">
             <a:avLst/>
@@ -9988,314 +9668,24 @@
           </a:bodyPr>
           <a:lstStyle/>
           <a:p>
-            <a:pPr>
-              <a:lnSpc>
-                <a:spcPct val="130000"/>
-              </a:lnSpc>
-            </a:pPr>
-            <a:r>
-              <a:rPr sz="1500">
-                <a:solidFill>
-                  <a:srgbClr val="33221E"/>
-                </a:solidFill>
-                <a:latin typeface="Avenir Next"/>
-                <a:ea typeface="Hiragino Sans"/>
-                <a:cs typeface="Hiragino Sans"/>
-              </a:rPr>
-              <a:t>送る電力 P と線間電圧 V を決めると電流が決まる：</a:t>
-            </a:r>
-            <a:r>
-              <a:rPr sz="1500" b="1">
-                <a:solidFill>
-                  <a:srgbClr val="33221E"/>
-                </a:solidFill>
-                <a:latin typeface="Avenir Next"/>
-                <a:ea typeface="Hiragino Sans"/>
-                <a:cs typeface="Hiragino Sans"/>
-              </a:rPr>
-              <a:t>I = P/(√3 V cosφ)</a:t>
-            </a:r>
-            <a:r>
-              <a:rPr sz="1500">
-                <a:solidFill>
-                  <a:srgbClr val="33221E"/>
-                </a:solidFill>
-                <a:latin typeface="Avenir Next"/>
-                <a:ea typeface="Hiragino Sans"/>
-                <a:cs typeface="Hiragino Sans"/>
-              </a:rPr>
-              <a:t>。同じ P なら、電流は V に反比例する。</a:t>
-            </a:r>
-          </a:p>
-        </p:txBody>
-      </p:sp>
-      <p:sp>
-        <p:nvSpPr>
-          <p:cNvPr id="5" name="Rectangle 4"/>
-          <p:cNvSpPr/>
-          <p:nvPr/>
-        </p:nvSpPr>
-        <p:spPr>
-          <a:xfrm>
-            <a:off x="566928" y="3059747"/>
-            <a:ext cx="11057839" cy="9525"/>
-          </a:xfrm>
-          <a:prstGeom prst="rect">
-            <a:avLst/>
-          </a:prstGeom>
-          <a:solidFill>
-            <a:srgbClr val="E5DCCE"/>
-          </a:solidFill>
-          <a:ln>
-            <a:noFill/>
-          </a:ln>
-          <a:effectLst/>
-        </p:spPr>
-        <p:style>
-          <a:lnRef idx="1">
-            <a:schemeClr val="accent1"/>
-          </a:lnRef>
-          <a:fillRef idx="3">
-            <a:schemeClr val="accent1"/>
-          </a:fillRef>
-          <a:effectRef idx="2">
-            <a:schemeClr val="accent1"/>
-          </a:effectRef>
-          <a:fontRef idx="minor">
-            <a:schemeClr val="lt1"/>
-          </a:fontRef>
-        </p:style>
-        <p:txBody>
-          <a:bodyPr rtlCol="0" anchor="ctr"/>
-          <a:lstStyle/>
-          <a:p>
             <a:pPr algn="ctr"/>
-          </a:p>
-        </p:txBody>
-      </p:sp>
-      <p:sp>
-        <p:nvSpPr>
-          <p:cNvPr id="6" name="TextBox 5"/>
-          <p:cNvSpPr txBox="1"/>
-          <p:nvPr/>
-        </p:nvSpPr>
-        <p:spPr>
-          <a:xfrm>
-            <a:off x="566928" y="3237039"/>
-            <a:ext cx="11057839" cy="254000"/>
-          </a:xfrm>
-          <a:prstGeom prst="rect">
-            <a:avLst/>
-          </a:prstGeom>
-          <a:noFill/>
-        </p:spPr>
-        <p:txBody>
-          <a:bodyPr wrap="none" lIns="0" rIns="0" tIns="0" bIns="0">
-            <a:noAutofit/>
-          </a:bodyPr>
-          <a:lstStyle/>
-          <a:p>
-            <a:r>
-              <a:rPr sz="1600" b="1">
-                <a:solidFill>
-                  <a:srgbClr val="5C7268"/>
-                </a:solidFill>
-                <a:latin typeface="Avenir Next"/>
-                <a:ea typeface="Hiragino Sans"/>
-                <a:cs typeface="Hiragino Sans"/>
-              </a:rPr>
-              <a:t>② ジュール損に代入する｜P_loss = 3 I² R（3 相分）</a:t>
-            </a:r>
-          </a:p>
-        </p:txBody>
-      </p:sp>
-      <p:sp>
-        <p:nvSpPr>
-          <p:cNvPr id="7" name="TextBox 6"/>
-          <p:cNvSpPr txBox="1"/>
-          <p:nvPr/>
-        </p:nvSpPr>
-        <p:spPr>
-          <a:xfrm>
-            <a:off x="822960" y="3529139"/>
-            <a:ext cx="10801807" cy="385762"/>
-          </a:xfrm>
-          <a:prstGeom prst="rect">
-            <a:avLst/>
-          </a:prstGeom>
-          <a:noFill/>
-        </p:spPr>
-        <p:txBody>
-          <a:bodyPr wrap="square" lIns="0" rIns="0" tIns="0" bIns="0">
-            <a:noAutofit/>
-          </a:bodyPr>
-          <a:lstStyle/>
-          <a:p>
-            <a:pPr>
-              <a:lnSpc>
-                <a:spcPct val="130000"/>
-              </a:lnSpc>
-            </a:pPr>
-            <a:r>
-              <a:rPr sz="1500">
-                <a:solidFill>
-                  <a:srgbClr val="33221E"/>
-                </a:solidFill>
-                <a:latin typeface="Avenir Next"/>
-                <a:ea typeface="Hiragino Sans"/>
-                <a:cs typeface="Hiragino Sans"/>
-              </a:rPr>
-              <a:t>3R × P²/(3 V² cos²φ) = </a:t>
-            </a:r>
-            <a:r>
-              <a:rPr sz="1500" b="1">
-                <a:solidFill>
-                  <a:srgbClr val="33221E"/>
-                </a:solidFill>
-                <a:latin typeface="Avenir Next"/>
-                <a:ea typeface="Hiragino Sans"/>
-                <a:cs typeface="Hiragino Sans"/>
-              </a:rPr>
-              <a:t>R P²/(V² cos²φ)</a:t>
-            </a:r>
-            <a:r>
-              <a:rPr sz="1500">
-                <a:solidFill>
-                  <a:srgbClr val="33221E"/>
-                </a:solidFill>
-                <a:latin typeface="Avenir Next"/>
-                <a:ea typeface="Hiragino Sans"/>
-                <a:cs typeface="Hiragino Sans"/>
-              </a:rPr>
-              <a:t>。3 が消えて、分母に V² と cos²φ が残る。</a:t>
-            </a:r>
-          </a:p>
-        </p:txBody>
-      </p:sp>
-      <p:sp>
-        <p:nvSpPr>
-          <p:cNvPr id="8" name="Rectangle 7"/>
-          <p:cNvSpPr/>
-          <p:nvPr/>
-        </p:nvSpPr>
-        <p:spPr>
-          <a:xfrm>
-            <a:off x="566928" y="4066793"/>
-            <a:ext cx="11057839" cy="9525"/>
-          </a:xfrm>
-          <a:prstGeom prst="rect">
-            <a:avLst/>
-          </a:prstGeom>
-          <a:solidFill>
-            <a:srgbClr val="E5DCCE"/>
-          </a:solidFill>
-          <a:ln>
-            <a:noFill/>
-          </a:ln>
-          <a:effectLst/>
-        </p:spPr>
-        <p:style>
-          <a:lnRef idx="1">
-            <a:schemeClr val="accent1"/>
-          </a:lnRef>
-          <a:fillRef idx="3">
-            <a:schemeClr val="accent1"/>
-          </a:fillRef>
-          <a:effectRef idx="2">
-            <a:schemeClr val="accent1"/>
-          </a:effectRef>
-          <a:fontRef idx="minor">
-            <a:schemeClr val="lt1"/>
-          </a:fontRef>
-        </p:style>
-        <p:txBody>
-          <a:bodyPr rtlCol="0" anchor="ctr"/>
-          <a:lstStyle/>
-          <a:p>
-            <a:pPr algn="ctr"/>
-          </a:p>
-        </p:txBody>
-      </p:sp>
-      <p:sp>
-        <p:nvSpPr>
-          <p:cNvPr id="9" name="build:ghost"/>
-          <p:cNvSpPr txBox="1"/>
-          <p:nvPr/>
-        </p:nvSpPr>
-        <p:spPr>
-          <a:xfrm>
-            <a:off x="566928" y="4244085"/>
-            <a:ext cx="11057839" cy="254000"/>
-          </a:xfrm>
-          <a:prstGeom prst="rect">
-            <a:avLst/>
-          </a:prstGeom>
-          <a:noFill/>
-        </p:spPr>
-        <p:txBody>
-          <a:bodyPr wrap="none" lIns="0" rIns="0" tIns="0" bIns="0">
-            <a:noAutofit/>
-          </a:bodyPr>
-          <a:lstStyle/>
-          <a:p>
-            <a:r>
-              <a:rPr sz="1600" b="1">
-                <a:solidFill>
-                  <a:srgbClr val="C1C9C5"/>
-                </a:solidFill>
-                <a:latin typeface="Avenir Next"/>
-                <a:ea typeface="Hiragino Sans"/>
-                <a:cs typeface="Hiragino Sans"/>
-              </a:rPr>
-              <a:t>③ 読み方｜V を 2 倍にすると損失は 1/4</a:t>
-            </a:r>
-          </a:p>
-        </p:txBody>
-      </p:sp>
-      <p:sp>
-        <p:nvSpPr>
-          <p:cNvPr id="10" name="build:ghost"/>
-          <p:cNvSpPr txBox="1"/>
-          <p:nvPr/>
-        </p:nvSpPr>
-        <p:spPr>
-          <a:xfrm>
-            <a:off x="822960" y="4536185"/>
-            <a:ext cx="10801807" cy="695325"/>
-          </a:xfrm>
-          <a:prstGeom prst="rect">
-            <a:avLst/>
-          </a:prstGeom>
-          <a:noFill/>
-        </p:spPr>
-        <p:txBody>
-          <a:bodyPr wrap="square" lIns="0" rIns="0" tIns="0" bIns="0">
-            <a:noAutofit/>
-          </a:bodyPr>
-          <a:lstStyle/>
-          <a:p>
-            <a:pPr>
-              <a:lnSpc>
-                <a:spcPct val="130000"/>
-              </a:lnSpc>
-            </a:pPr>
-            <a:r>
-              <a:rPr sz="1500">
-                <a:solidFill>
-                  <a:srgbClr val="C1BCBB"/>
-                </a:solidFill>
-                <a:latin typeface="Avenir Next"/>
-                <a:ea typeface="Hiragino Sans"/>
-                <a:cs typeface="Hiragino Sans"/>
-              </a:rPr>
-              <a:t>R は 1 乗（電線を太くしても効きにくい）、V と cosφ は 2 乗。275 → 500 kV で (275/500)² = 0.30 倍、力率 0.8 は 1/0.64 = 1.56 倍。</a:t>
-            </a:r>
-          </a:p>
-        </p:txBody>
-      </p:sp>
-      <p:sp>
-        <p:nvSpPr>
-          <p:cNvPr id="11" name="TextBox 10"/>
+            <a:r>
+              <a:rPr sz="1400">
+                <a:solidFill>
+                  <a:srgbClr val="71635B"/>
+                </a:solidFill>
+                <a:latin typeface="Avenir Next"/>
+                <a:ea typeface="Hiragino Sans"/>
+                <a:cs typeface="Hiragino Sans"/>
+              </a:rPr>
+              <a:t>3R × P²/(3 V² cos²φ) = R P²/(V² cos²φ)。3 が消えて、分母に V² と cos²φ が残る。　出典｜コード/fig_ch02.py</a:t>
+            </a:r>
+          </a:p>
+        </p:txBody>
+      </p:sp>
+      <p:sp>
+        <p:nvSpPr>
+          <p:cNvPr id="5" name="TextBox 4"/>
           <p:cNvSpPr txBox="1"/>
           <p:nvPr/>
         </p:nvSpPr>
@@ -10351,59 +9741,14 @@
       <p:grpSpPr/>
       <p:sp>
         <p:nvSpPr>
-          <p:cNvPr id="2" name="TextBox 1"/>
+          <p:cNvPr id="2" name="edge:title"/>
           <p:cNvSpPr txBox="1"/>
           <p:nvPr/>
         </p:nvSpPr>
         <p:spPr>
           <a:xfrm>
-            <a:off x="566928" y="457200"/>
-            <a:ext cx="11057839" cy="658368"/>
-          </a:xfrm>
-          <a:prstGeom prst="rect">
-            <a:avLst/>
-          </a:prstGeom>
-          <a:noFill/>
-        </p:spPr>
-        <p:txBody>
-          <a:bodyPr wrap="square" lIns="0" rIns="0" tIns="0" bIns="0" anchor="ctr">
-            <a:noAutofit/>
-          </a:bodyPr>
-          <a:lstStyle/>
-          <a:p>
-            <a:pPr>
-              <a:lnSpc>
-                <a:spcPct val="106000"/>
-              </a:lnSpc>
-              <a:defRPr sz="3390" b="1">
-                <a:solidFill>
-                  <a:srgbClr val="7C332A"/>
-                </a:solidFill>
-                <a:latin typeface="Avenir Next"/>
-                <a:ea typeface="Hiragino Sans"/>
-                <a:cs typeface="Hiragino Sans"/>
-              </a:defRPr>
-            </a:pPr>
-            <a:r>
-              <a:rPr>
-                <a:ea typeface="Hiragino Sans"/>
-                <a:cs typeface="Hiragino Sans"/>
-              </a:rPr>
-              <a:t>導出 — 損失は電圧の 2 乗に反比例する</a:t>
-            </a:r>
-          </a:p>
-        </p:txBody>
-      </p:sp>
-      <p:sp>
-        <p:nvSpPr>
-          <p:cNvPr id="3" name="TextBox 2"/>
-          <p:cNvSpPr txBox="1"/>
-          <p:nvPr/>
-        </p:nvSpPr>
-        <p:spPr>
-          <a:xfrm>
-            <a:off x="566928" y="2229993"/>
-            <a:ext cx="11057839" cy="254000"/>
+            <a:off x="566928" y="146304"/>
+            <a:ext cx="11057839" cy="457200"/>
           </a:xfrm>
           <a:prstGeom prst="rect">
             <a:avLst/>
@@ -10416,30 +9761,60 @@
           </a:bodyPr>
           <a:lstStyle/>
           <a:p>
-            <a:r>
-              <a:rPr sz="1600" b="1">
-                <a:solidFill>
-                  <a:srgbClr val="5C7268"/>
-                </a:solidFill>
-                <a:latin typeface="Avenir Next"/>
-                <a:ea typeface="Hiragino Sans"/>
-                <a:cs typeface="Hiragino Sans"/>
-              </a:rPr>
-              <a:t>① 三相電力から電流を出す｜P = √3 V I cosφ</a:t>
-            </a:r>
-          </a:p>
-        </p:txBody>
-      </p:sp>
-      <p:sp>
-        <p:nvSpPr>
-          <p:cNvPr id="4" name="TextBox 3"/>
+            <a:pPr>
+              <a:defRPr sz="2400" b="1">
+                <a:solidFill>
+                  <a:srgbClr val="7C332A"/>
+                </a:solidFill>
+                <a:latin typeface="Avenir Next"/>
+                <a:ea typeface="Hiragino Sans"/>
+                <a:cs typeface="Hiragino Sans"/>
+              </a:defRPr>
+            </a:pPr>
+            <a:r>
+              <a:rPr>
+                <a:ea typeface="Hiragino Sans"/>
+                <a:cs typeface="Hiragino Sans"/>
+              </a:rPr>
+              <a:t>導出 — 損失は電圧の 2 乗に反比例する</a:t>
+            </a:r>
+          </a:p>
+        </p:txBody>
+      </p:sp>
+      <p:pic>
+        <p:nvPicPr>
+          <p:cNvPr id="3" name="Picture 2" descr="ch02_deriv_loss_3.png"/>
+          <p:cNvPicPr>
+            <a:picLocks noChangeAspect="1"/>
+          </p:cNvPicPr>
+          <p:nvPr/>
+        </p:nvPicPr>
+        <p:blipFill>
+          <a:blip r:embed="rId2"/>
+          <a:stretch>
+            <a:fillRect/>
+          </a:stretch>
+        </p:blipFill>
+        <p:spPr>
+          <a:xfrm>
+            <a:off x="750689" y="713232"/>
+            <a:ext cx="10690317" cy="5322316"/>
+          </a:xfrm>
+          <a:prstGeom prst="rect">
+            <a:avLst/>
+          </a:prstGeom>
+        </p:spPr>
+      </p:pic>
+      <p:sp>
+        <p:nvSpPr>
+          <p:cNvPr id="4" name="edge:caption"/>
           <p:cNvSpPr txBox="1"/>
           <p:nvPr/>
         </p:nvSpPr>
         <p:spPr>
           <a:xfrm>
-            <a:off x="822960" y="2522093"/>
-            <a:ext cx="10801807" cy="385762"/>
+            <a:off x="228600" y="6090412"/>
+            <a:ext cx="11734495" cy="520700"/>
           </a:xfrm>
           <a:prstGeom prst="rect">
             <a:avLst/>
@@ -10452,314 +9827,24 @@
           </a:bodyPr>
           <a:lstStyle/>
           <a:p>
-            <a:pPr>
-              <a:lnSpc>
-                <a:spcPct val="130000"/>
-              </a:lnSpc>
-            </a:pPr>
-            <a:r>
-              <a:rPr sz="1500">
-                <a:solidFill>
-                  <a:srgbClr val="33221E"/>
-                </a:solidFill>
-                <a:latin typeface="Avenir Next"/>
-                <a:ea typeface="Hiragino Sans"/>
-                <a:cs typeface="Hiragino Sans"/>
-              </a:rPr>
-              <a:t>送る電力 P と線間電圧 V を決めると電流が決まる：</a:t>
-            </a:r>
-            <a:r>
-              <a:rPr sz="1500" b="1">
-                <a:solidFill>
-                  <a:srgbClr val="33221E"/>
-                </a:solidFill>
-                <a:latin typeface="Avenir Next"/>
-                <a:ea typeface="Hiragino Sans"/>
-                <a:cs typeface="Hiragino Sans"/>
-              </a:rPr>
-              <a:t>I = P/(√3 V cosφ)</a:t>
-            </a:r>
-            <a:r>
-              <a:rPr sz="1500">
-                <a:solidFill>
-                  <a:srgbClr val="33221E"/>
-                </a:solidFill>
-                <a:latin typeface="Avenir Next"/>
-                <a:ea typeface="Hiragino Sans"/>
-                <a:cs typeface="Hiragino Sans"/>
-              </a:rPr>
-              <a:t>。同じ P なら、電流は V に反比例する。</a:t>
-            </a:r>
-          </a:p>
-        </p:txBody>
-      </p:sp>
-      <p:sp>
-        <p:nvSpPr>
-          <p:cNvPr id="5" name="Rectangle 4"/>
-          <p:cNvSpPr/>
-          <p:nvPr/>
-        </p:nvSpPr>
-        <p:spPr>
-          <a:xfrm>
-            <a:off x="566928" y="3059747"/>
-            <a:ext cx="11057839" cy="9525"/>
-          </a:xfrm>
-          <a:prstGeom prst="rect">
-            <a:avLst/>
-          </a:prstGeom>
-          <a:solidFill>
-            <a:srgbClr val="E5DCCE"/>
-          </a:solidFill>
-          <a:ln>
-            <a:noFill/>
-          </a:ln>
-          <a:effectLst/>
-        </p:spPr>
-        <p:style>
-          <a:lnRef idx="1">
-            <a:schemeClr val="accent1"/>
-          </a:lnRef>
-          <a:fillRef idx="3">
-            <a:schemeClr val="accent1"/>
-          </a:fillRef>
-          <a:effectRef idx="2">
-            <a:schemeClr val="accent1"/>
-          </a:effectRef>
-          <a:fontRef idx="minor">
-            <a:schemeClr val="lt1"/>
-          </a:fontRef>
-        </p:style>
-        <p:txBody>
-          <a:bodyPr rtlCol="0" anchor="ctr"/>
-          <a:lstStyle/>
-          <a:p>
             <a:pPr algn="ctr"/>
-          </a:p>
-        </p:txBody>
-      </p:sp>
-      <p:sp>
-        <p:nvSpPr>
-          <p:cNvPr id="6" name="TextBox 5"/>
-          <p:cNvSpPr txBox="1"/>
-          <p:nvPr/>
-        </p:nvSpPr>
-        <p:spPr>
-          <a:xfrm>
-            <a:off x="566928" y="3237039"/>
-            <a:ext cx="11057839" cy="254000"/>
-          </a:xfrm>
-          <a:prstGeom prst="rect">
-            <a:avLst/>
-          </a:prstGeom>
-          <a:noFill/>
-        </p:spPr>
-        <p:txBody>
-          <a:bodyPr wrap="none" lIns="0" rIns="0" tIns="0" bIns="0">
-            <a:noAutofit/>
-          </a:bodyPr>
-          <a:lstStyle/>
-          <a:p>
-            <a:r>
-              <a:rPr sz="1600" b="1">
-                <a:solidFill>
-                  <a:srgbClr val="5C7268"/>
-                </a:solidFill>
-                <a:latin typeface="Avenir Next"/>
-                <a:ea typeface="Hiragino Sans"/>
-                <a:cs typeface="Hiragino Sans"/>
-              </a:rPr>
-              <a:t>② ジュール損に代入する｜P_loss = 3 I² R（3 相分）</a:t>
-            </a:r>
-          </a:p>
-        </p:txBody>
-      </p:sp>
-      <p:sp>
-        <p:nvSpPr>
-          <p:cNvPr id="7" name="TextBox 6"/>
-          <p:cNvSpPr txBox="1"/>
-          <p:nvPr/>
-        </p:nvSpPr>
-        <p:spPr>
-          <a:xfrm>
-            <a:off x="822960" y="3529139"/>
-            <a:ext cx="10801807" cy="385762"/>
-          </a:xfrm>
-          <a:prstGeom prst="rect">
-            <a:avLst/>
-          </a:prstGeom>
-          <a:noFill/>
-        </p:spPr>
-        <p:txBody>
-          <a:bodyPr wrap="square" lIns="0" rIns="0" tIns="0" bIns="0">
-            <a:noAutofit/>
-          </a:bodyPr>
-          <a:lstStyle/>
-          <a:p>
-            <a:pPr>
-              <a:lnSpc>
-                <a:spcPct val="130000"/>
-              </a:lnSpc>
-            </a:pPr>
-            <a:r>
-              <a:rPr sz="1500">
-                <a:solidFill>
-                  <a:srgbClr val="33221E"/>
-                </a:solidFill>
-                <a:latin typeface="Avenir Next"/>
-                <a:ea typeface="Hiragino Sans"/>
-                <a:cs typeface="Hiragino Sans"/>
-              </a:rPr>
-              <a:t>3R × P²/(3 V² cos²φ) = </a:t>
-            </a:r>
-            <a:r>
-              <a:rPr sz="1500" b="1">
-                <a:solidFill>
-                  <a:srgbClr val="33221E"/>
-                </a:solidFill>
-                <a:latin typeface="Avenir Next"/>
-                <a:ea typeface="Hiragino Sans"/>
-                <a:cs typeface="Hiragino Sans"/>
-              </a:rPr>
-              <a:t>R P²/(V² cos²φ)</a:t>
-            </a:r>
-            <a:r>
-              <a:rPr sz="1500">
-                <a:solidFill>
-                  <a:srgbClr val="33221E"/>
-                </a:solidFill>
-                <a:latin typeface="Avenir Next"/>
-                <a:ea typeface="Hiragino Sans"/>
-                <a:cs typeface="Hiragino Sans"/>
-              </a:rPr>
-              <a:t>。3 が消えて、分母に V² と cos²φ が残る。</a:t>
-            </a:r>
-          </a:p>
-        </p:txBody>
-      </p:sp>
-      <p:sp>
-        <p:nvSpPr>
-          <p:cNvPr id="8" name="Rectangle 7"/>
-          <p:cNvSpPr/>
-          <p:nvPr/>
-        </p:nvSpPr>
-        <p:spPr>
-          <a:xfrm>
-            <a:off x="566928" y="4066793"/>
-            <a:ext cx="11057839" cy="9525"/>
-          </a:xfrm>
-          <a:prstGeom prst="rect">
-            <a:avLst/>
-          </a:prstGeom>
-          <a:solidFill>
-            <a:srgbClr val="E5DCCE"/>
-          </a:solidFill>
-          <a:ln>
-            <a:noFill/>
-          </a:ln>
-          <a:effectLst/>
-        </p:spPr>
-        <p:style>
-          <a:lnRef idx="1">
-            <a:schemeClr val="accent1"/>
-          </a:lnRef>
-          <a:fillRef idx="3">
-            <a:schemeClr val="accent1"/>
-          </a:fillRef>
-          <a:effectRef idx="2">
-            <a:schemeClr val="accent1"/>
-          </a:effectRef>
-          <a:fontRef idx="minor">
-            <a:schemeClr val="lt1"/>
-          </a:fontRef>
-        </p:style>
-        <p:txBody>
-          <a:bodyPr rtlCol="0" anchor="ctr"/>
-          <a:lstStyle/>
-          <a:p>
-            <a:pPr algn="ctr"/>
-          </a:p>
-        </p:txBody>
-      </p:sp>
-      <p:sp>
-        <p:nvSpPr>
-          <p:cNvPr id="9" name="TextBox 8"/>
-          <p:cNvSpPr txBox="1"/>
-          <p:nvPr/>
-        </p:nvSpPr>
-        <p:spPr>
-          <a:xfrm>
-            <a:off x="566928" y="4244085"/>
-            <a:ext cx="11057839" cy="254000"/>
-          </a:xfrm>
-          <a:prstGeom prst="rect">
-            <a:avLst/>
-          </a:prstGeom>
-          <a:noFill/>
-        </p:spPr>
-        <p:txBody>
-          <a:bodyPr wrap="none" lIns="0" rIns="0" tIns="0" bIns="0">
-            <a:noAutofit/>
-          </a:bodyPr>
-          <a:lstStyle/>
-          <a:p>
-            <a:r>
-              <a:rPr sz="1600" b="1">
-                <a:solidFill>
-                  <a:srgbClr val="5C7268"/>
-                </a:solidFill>
-                <a:latin typeface="Avenir Next"/>
-                <a:ea typeface="Hiragino Sans"/>
-                <a:cs typeface="Hiragino Sans"/>
-              </a:rPr>
-              <a:t>③ 読み方｜V を 2 倍にすると損失は 1/4</a:t>
-            </a:r>
-          </a:p>
-        </p:txBody>
-      </p:sp>
-      <p:sp>
-        <p:nvSpPr>
-          <p:cNvPr id="10" name="TextBox 9"/>
-          <p:cNvSpPr txBox="1"/>
-          <p:nvPr/>
-        </p:nvSpPr>
-        <p:spPr>
-          <a:xfrm>
-            <a:off x="822960" y="4536185"/>
-            <a:ext cx="10801807" cy="695325"/>
-          </a:xfrm>
-          <a:prstGeom prst="rect">
-            <a:avLst/>
-          </a:prstGeom>
-          <a:noFill/>
-        </p:spPr>
-        <p:txBody>
-          <a:bodyPr wrap="square" lIns="0" rIns="0" tIns="0" bIns="0">
-            <a:noAutofit/>
-          </a:bodyPr>
-          <a:lstStyle/>
-          <a:p>
-            <a:pPr>
-              <a:lnSpc>
-                <a:spcPct val="130000"/>
-              </a:lnSpc>
-            </a:pPr>
-            <a:r>
-              <a:rPr sz="1500">
-                <a:solidFill>
-                  <a:srgbClr val="33221E"/>
-                </a:solidFill>
-                <a:latin typeface="Avenir Next"/>
-                <a:ea typeface="Hiragino Sans"/>
-                <a:cs typeface="Hiragino Sans"/>
-              </a:rPr>
-              <a:t>R は 1 乗（電線を太くしても効きにくい）、V と cosφ は 2 乗。275 → 500 kV で (275/500)² = 0.30 倍、力率 0.8 は 1/0.64 = 1.56 倍。</a:t>
-            </a:r>
-          </a:p>
-        </p:txBody>
-      </p:sp>
-      <p:sp>
-        <p:nvSpPr>
-          <p:cNvPr id="11" name="TextBox 10"/>
+            <a:r>
+              <a:rPr sz="1400">
+                <a:solidFill>
+                  <a:srgbClr val="71635B"/>
+                </a:solidFill>
+                <a:latin typeface="Avenir Next"/>
+                <a:ea typeface="Hiragino Sans"/>
+                <a:cs typeface="Hiragino Sans"/>
+              </a:rPr>
+              <a:t>R は 1 乗（電線を太くしても効きにくい）、V と cosφ は 2 乗。275 → 500 kV で (275/500)² = 0.30 倍、力率 0.8 は 1/0.64 = 1.56 倍。　出典｜コード/fig_ch02.py</a:t>
+            </a:r>
+          </a:p>
+        </p:txBody>
+      </p:sp>
+      <p:sp>
+        <p:nvSpPr>
+          <p:cNvPr id="5" name="TextBox 4"/>
           <p:cNvSpPr txBox="1"/>
           <p:nvPr/>
         </p:nvSpPr>
@@ -13915,59 +13000,14 @@
       <p:grpSpPr/>
       <p:sp>
         <p:nvSpPr>
-          <p:cNvPr id="2" name="TextBox 1"/>
+          <p:cNvPr id="2" name="edge:title"/>
           <p:cNvSpPr txBox="1"/>
           <p:nvPr/>
         </p:nvSpPr>
         <p:spPr>
           <a:xfrm>
-            <a:off x="566928" y="457200"/>
-            <a:ext cx="11057839" cy="658368"/>
-          </a:xfrm>
-          <a:prstGeom prst="rect">
-            <a:avLst/>
-          </a:prstGeom>
-          <a:noFill/>
-        </p:spPr>
-        <p:txBody>
-          <a:bodyPr wrap="square" lIns="0" rIns="0" tIns="0" bIns="0" anchor="ctr">
-            <a:noAutofit/>
-          </a:bodyPr>
-          <a:lstStyle/>
-          <a:p>
-            <a:pPr>
-              <a:lnSpc>
-                <a:spcPct val="106000"/>
-              </a:lnSpc>
-              <a:defRPr sz="3390" b="1">
-                <a:solidFill>
-                  <a:srgbClr val="7C332A"/>
-                </a:solidFill>
-                <a:latin typeface="Avenir Next"/>
-                <a:ea typeface="Hiragino Sans"/>
-                <a:cs typeface="Hiragino Sans"/>
-              </a:defRPr>
-            </a:pPr>
-            <a:r>
-              <a:rPr>
-                <a:ea typeface="Hiragino Sans"/>
-                <a:cs typeface="Hiragino Sans"/>
-              </a:rPr>
-              <a:t>導出 — 並列線路の分流は逆比で決まる</a:t>
-            </a:r>
-          </a:p>
-        </p:txBody>
-      </p:sp>
-      <p:sp>
-        <p:nvSpPr>
-          <p:cNvPr id="3" name="TextBox 2"/>
-          <p:cNvSpPr txBox="1"/>
-          <p:nvPr/>
-        </p:nvSpPr>
-        <p:spPr>
-          <a:xfrm>
-            <a:off x="566928" y="1920430"/>
-            <a:ext cx="11057839" cy="254000"/>
+            <a:off x="566928" y="146304"/>
+            <a:ext cx="11057839" cy="457200"/>
           </a:xfrm>
           <a:prstGeom prst="rect">
             <a:avLst/>
@@ -13980,30 +13020,60 @@
           </a:bodyPr>
           <a:lstStyle/>
           <a:p>
-            <a:r>
-              <a:rPr sz="1600" b="1">
-                <a:solidFill>
-                  <a:srgbClr val="5C7268"/>
-                </a:solidFill>
-                <a:latin typeface="Avenir Next"/>
-                <a:ea typeface="Hiragino Sans"/>
-                <a:cs typeface="Hiragino Sans"/>
-              </a:rPr>
-              <a:t>① 両端の電圧が共通｜Z₁ I₁ = Z₂ I₂</a:t>
-            </a:r>
-          </a:p>
-        </p:txBody>
-      </p:sp>
-      <p:sp>
-        <p:nvSpPr>
-          <p:cNvPr id="4" name="TextBox 3"/>
+            <a:pPr>
+              <a:defRPr sz="2400" b="1">
+                <a:solidFill>
+                  <a:srgbClr val="7C332A"/>
+                </a:solidFill>
+                <a:latin typeface="Avenir Next"/>
+                <a:ea typeface="Hiragino Sans"/>
+                <a:cs typeface="Hiragino Sans"/>
+              </a:defRPr>
+            </a:pPr>
+            <a:r>
+              <a:rPr>
+                <a:ea typeface="Hiragino Sans"/>
+                <a:cs typeface="Hiragino Sans"/>
+              </a:rPr>
+              <a:t>導出 — 並列線路の分流は逆比で決まる</a:t>
+            </a:r>
+          </a:p>
+        </p:txBody>
+      </p:sp>
+      <p:pic>
+        <p:nvPicPr>
+          <p:cNvPr id="3" name="Picture 2" descr="ch02_deriv_parallel_1.png"/>
+          <p:cNvPicPr>
+            <a:picLocks noChangeAspect="1"/>
+          </p:cNvPicPr>
+          <p:nvPr/>
+        </p:nvPicPr>
+        <p:blipFill>
+          <a:blip r:embed="rId2"/>
+          <a:stretch>
+            <a:fillRect/>
+          </a:stretch>
+        </p:blipFill>
+        <p:spPr>
+          <a:xfrm>
+            <a:off x="712618" y="713232"/>
+            <a:ext cx="10766458" cy="5322316"/>
+          </a:xfrm>
+          <a:prstGeom prst="rect">
+            <a:avLst/>
+          </a:prstGeom>
+        </p:spPr>
+      </p:pic>
+      <p:sp>
+        <p:nvSpPr>
+          <p:cNvPr id="4" name="edge:caption"/>
           <p:cNvSpPr txBox="1"/>
           <p:nvPr/>
         </p:nvSpPr>
         <p:spPr>
           <a:xfrm>
-            <a:off x="822960" y="2212530"/>
-            <a:ext cx="10801807" cy="695325"/>
+            <a:off x="228600" y="6090412"/>
+            <a:ext cx="11734495" cy="520700"/>
           </a:xfrm>
           <a:prstGeom prst="rect">
             <a:avLst/>
@@ -14016,358 +13086,24 @@
           </a:bodyPr>
           <a:lstStyle/>
           <a:p>
-            <a:pPr>
-              <a:lnSpc>
-                <a:spcPct val="130000"/>
-              </a:lnSpc>
-            </a:pPr>
-            <a:r>
-              <a:rPr sz="1500">
-                <a:solidFill>
-                  <a:srgbClr val="33221E"/>
-                </a:solidFill>
-                <a:latin typeface="Avenir Next"/>
-                <a:ea typeface="Hiragino Sans"/>
-                <a:cs typeface="Hiragino Sans"/>
-              </a:rPr>
-              <a:t>並列の 2 回線は同じ母線 A・B をつなぐので電圧降下が等しい。よって </a:t>
-            </a:r>
-            <a:r>
-              <a:rPr sz="1500" b="1">
-                <a:solidFill>
-                  <a:srgbClr val="33221E"/>
-                </a:solidFill>
-                <a:latin typeface="Avenir Next"/>
-                <a:ea typeface="Hiragino Sans"/>
-                <a:cs typeface="Hiragino Sans"/>
-              </a:rPr>
-              <a:t>I₁/I₂ = Z₂/Z₁</a:t>
-            </a:r>
-            <a:r>
-              <a:rPr sz="1500">
-                <a:solidFill>
-                  <a:srgbClr val="33221E"/>
-                </a:solidFill>
-                <a:latin typeface="Avenir Next"/>
-                <a:ea typeface="Hiragino Sans"/>
-                <a:cs typeface="Hiragino Sans"/>
-              </a:rPr>
-              <a:t>。インピーダンスが小さい回線に多く流れる（逆比）。</a:t>
-            </a:r>
-          </a:p>
-        </p:txBody>
-      </p:sp>
-      <p:sp>
-        <p:nvSpPr>
-          <p:cNvPr id="5" name="Rectangle 4"/>
-          <p:cNvSpPr/>
-          <p:nvPr/>
-        </p:nvSpPr>
-        <p:spPr>
-          <a:xfrm>
-            <a:off x="566928" y="3059747"/>
-            <a:ext cx="11057839" cy="9525"/>
-          </a:xfrm>
-          <a:prstGeom prst="rect">
-            <a:avLst/>
-          </a:prstGeom>
-          <a:solidFill>
-            <a:srgbClr val="E5DCCE"/>
-          </a:solidFill>
-          <a:ln>
-            <a:noFill/>
-          </a:ln>
-          <a:effectLst/>
-        </p:spPr>
-        <p:style>
-          <a:lnRef idx="1">
-            <a:schemeClr val="accent1"/>
-          </a:lnRef>
-          <a:fillRef idx="3">
-            <a:schemeClr val="accent1"/>
-          </a:fillRef>
-          <a:effectRef idx="2">
-            <a:schemeClr val="accent1"/>
-          </a:effectRef>
-          <a:fontRef idx="minor">
-            <a:schemeClr val="lt1"/>
-          </a:fontRef>
-        </p:style>
-        <p:txBody>
-          <a:bodyPr rtlCol="0" anchor="ctr"/>
-          <a:lstStyle/>
-          <a:p>
             <a:pPr algn="ctr"/>
-          </a:p>
-        </p:txBody>
-      </p:sp>
-      <p:sp>
-        <p:nvSpPr>
-          <p:cNvPr id="6" name="build:ghost"/>
-          <p:cNvSpPr txBox="1"/>
-          <p:nvPr/>
-        </p:nvSpPr>
-        <p:spPr>
-          <a:xfrm>
-            <a:off x="566928" y="3237039"/>
-            <a:ext cx="11057839" cy="254000"/>
-          </a:xfrm>
-          <a:prstGeom prst="rect">
-            <a:avLst/>
-          </a:prstGeom>
-          <a:noFill/>
-        </p:spPr>
-        <p:txBody>
-          <a:bodyPr wrap="none" lIns="0" rIns="0" tIns="0" bIns="0">
-            <a:noAutofit/>
-          </a:bodyPr>
-          <a:lstStyle/>
-          <a:p>
-            <a:r>
-              <a:rPr sz="1600" b="1">
-                <a:solidFill>
-                  <a:srgbClr val="C1C9C5"/>
-                </a:solidFill>
-                <a:latin typeface="Avenir Next"/>
-                <a:ea typeface="Hiragino Sans"/>
-                <a:cs typeface="Hiragino Sans"/>
-              </a:rPr>
-              <a:t>② 全電流で割り付ける｜I₁ = I Z₂/(Z₁ + Z₂)</a:t>
-            </a:r>
-          </a:p>
-        </p:txBody>
-      </p:sp>
-      <p:sp>
-        <p:nvSpPr>
-          <p:cNvPr id="7" name="build:ghost"/>
-          <p:cNvSpPr txBox="1"/>
-          <p:nvPr/>
-        </p:nvSpPr>
-        <p:spPr>
-          <a:xfrm>
-            <a:off x="822960" y="3529139"/>
-            <a:ext cx="10801807" cy="695325"/>
-          </a:xfrm>
-          <a:prstGeom prst="rect">
-            <a:avLst/>
-          </a:prstGeom>
-          <a:noFill/>
-        </p:spPr>
-        <p:txBody>
-          <a:bodyPr wrap="square" lIns="0" rIns="0" tIns="0" bIns="0">
-            <a:noAutofit/>
-          </a:bodyPr>
-          <a:lstStyle/>
-          <a:p>
-            <a:pPr>
-              <a:lnSpc>
-                <a:spcPct val="130000"/>
-              </a:lnSpc>
-            </a:pPr>
-            <a:r>
-              <a:rPr sz="1500">
-                <a:solidFill>
-                  <a:srgbClr val="C1BCBB"/>
-                </a:solidFill>
-                <a:latin typeface="Avenir Next"/>
-                <a:ea typeface="Hiragino Sans"/>
-                <a:cs typeface="Hiragino Sans"/>
-              </a:rPr>
-              <a:t>Z₁ = 10 Ω、Z₂ = 15 Ω、I = 1,000 A なら I₁ = 1,000 × 15/25 = </a:t>
-            </a:r>
-            <a:r>
-              <a:rPr sz="1500" b="1">
-                <a:solidFill>
-                  <a:srgbClr val="C1BCBB"/>
-                </a:solidFill>
-                <a:latin typeface="Avenir Next"/>
-                <a:ea typeface="Hiragino Sans"/>
-                <a:cs typeface="Hiragino Sans"/>
-              </a:rPr>
-              <a:t>600 A</a:t>
-            </a:r>
-            <a:r>
-              <a:rPr sz="1500">
-                <a:solidFill>
-                  <a:srgbClr val="C1BCBB"/>
-                </a:solidFill>
-                <a:latin typeface="Avenir Next"/>
-                <a:ea typeface="Hiragino Sans"/>
-                <a:cs typeface="Hiragino Sans"/>
-              </a:rPr>
-              <a:t>、I₂ = </a:t>
-            </a:r>
-            <a:r>
-              <a:rPr sz="1500" b="1">
-                <a:solidFill>
-                  <a:srgbClr val="C1BCBB"/>
-                </a:solidFill>
-                <a:latin typeface="Avenir Next"/>
-                <a:ea typeface="Hiragino Sans"/>
-                <a:cs typeface="Hiragino Sans"/>
-              </a:rPr>
-              <a:t>400 A</a:t>
-            </a:r>
-            <a:r>
-              <a:rPr sz="1500">
-                <a:solidFill>
-                  <a:srgbClr val="C1BCBB"/>
-                </a:solidFill>
-                <a:latin typeface="Avenir Next"/>
-                <a:ea typeface="Hiragino Sans"/>
-                <a:cs typeface="Hiragino Sans"/>
-              </a:rPr>
-              <a:t>。運転者が選ぶのではなく、キルヒホッフが決める。</a:t>
-            </a:r>
-          </a:p>
-        </p:txBody>
-      </p:sp>
-      <p:sp>
-        <p:nvSpPr>
-          <p:cNvPr id="8" name="Rectangle 7"/>
-          <p:cNvSpPr/>
-          <p:nvPr/>
-        </p:nvSpPr>
-        <p:spPr>
-          <a:xfrm>
-            <a:off x="566928" y="4376356"/>
-            <a:ext cx="11057839" cy="9525"/>
-          </a:xfrm>
-          <a:prstGeom prst="rect">
-            <a:avLst/>
-          </a:prstGeom>
-          <a:solidFill>
-            <a:srgbClr val="E5DCCE"/>
-          </a:solidFill>
-          <a:ln>
-            <a:noFill/>
-          </a:ln>
-          <a:effectLst/>
-        </p:spPr>
-        <p:style>
-          <a:lnRef idx="1">
-            <a:schemeClr val="accent1"/>
-          </a:lnRef>
-          <a:fillRef idx="3">
-            <a:schemeClr val="accent1"/>
-          </a:fillRef>
-          <a:effectRef idx="2">
-            <a:schemeClr val="accent1"/>
-          </a:effectRef>
-          <a:fontRef idx="minor">
-            <a:schemeClr val="lt1"/>
-          </a:fontRef>
-        </p:style>
-        <p:txBody>
-          <a:bodyPr rtlCol="0" anchor="ctr"/>
-          <a:lstStyle/>
-          <a:p>
-            <a:pPr algn="ctr"/>
-          </a:p>
-        </p:txBody>
-      </p:sp>
-      <p:sp>
-        <p:nvSpPr>
-          <p:cNvPr id="9" name="build:ghost"/>
-          <p:cNvSpPr txBox="1"/>
-          <p:nvPr/>
-        </p:nvSpPr>
-        <p:spPr>
-          <a:xfrm>
-            <a:off x="566928" y="4553648"/>
-            <a:ext cx="11057839" cy="254000"/>
-          </a:xfrm>
-          <a:prstGeom prst="rect">
-            <a:avLst/>
-          </a:prstGeom>
-          <a:noFill/>
-        </p:spPr>
-        <p:txBody>
-          <a:bodyPr wrap="none" lIns="0" rIns="0" tIns="0" bIns="0">
-            <a:noAutofit/>
-          </a:bodyPr>
-          <a:lstStyle/>
-          <a:p>
-            <a:r>
-              <a:rPr sz="1600" b="1">
-                <a:solidFill>
-                  <a:srgbClr val="C1C9C5"/>
-                </a:solidFill>
-                <a:latin typeface="Avenir Next"/>
-                <a:ea typeface="Hiragino Sans"/>
-                <a:cs typeface="Hiragino Sans"/>
-              </a:rPr>
-              <a:t>③ 1 回線を失うと｜残りが全電流を負う</a:t>
-            </a:r>
-          </a:p>
-        </p:txBody>
-      </p:sp>
-      <p:sp>
-        <p:nvSpPr>
-          <p:cNvPr id="10" name="build:ghost"/>
-          <p:cNvSpPr txBox="1"/>
-          <p:nvPr/>
-        </p:nvSpPr>
-        <p:spPr>
-          <a:xfrm>
-            <a:off x="822960" y="4845748"/>
-            <a:ext cx="10801807" cy="695325"/>
-          </a:xfrm>
-          <a:prstGeom prst="rect">
-            <a:avLst/>
-          </a:prstGeom>
-          <a:noFill/>
-        </p:spPr>
-        <p:txBody>
-          <a:bodyPr wrap="square" lIns="0" rIns="0" tIns="0" bIns="0">
-            <a:noAutofit/>
-          </a:bodyPr>
-          <a:lstStyle/>
-          <a:p>
-            <a:pPr>
-              <a:lnSpc>
-                <a:spcPct val="130000"/>
-              </a:lnSpc>
-            </a:pPr>
-            <a:r>
-              <a:rPr sz="1500">
-                <a:solidFill>
-                  <a:srgbClr val="C1BCBB"/>
-                </a:solidFill>
-                <a:latin typeface="Avenir Next"/>
-                <a:ea typeface="Hiragino Sans"/>
-                <a:cs typeface="Hiragino Sans"/>
-              </a:rPr>
-              <a:t>回線 1 が開放されると I₂ = 1,000 A。定格 700 A なら </a:t>
-            </a:r>
-            <a:r>
-              <a:rPr sz="1500" b="1">
-                <a:solidFill>
-                  <a:srgbClr val="C1BCBB"/>
-                </a:solidFill>
-                <a:latin typeface="Avenir Next"/>
-                <a:ea typeface="Hiragino Sans"/>
-                <a:cs typeface="Hiragino Sans"/>
-              </a:rPr>
-              <a:t>143%</a:t>
-            </a:r>
-            <a:r>
-              <a:rPr sz="1500">
-                <a:solidFill>
-                  <a:srgbClr val="C1BCBB"/>
-                </a:solidFill>
-                <a:latin typeface="Avenir Next"/>
-                <a:ea typeface="Hiragino Sans"/>
-                <a:cs typeface="Hiragino Sans"/>
-              </a:rPr>
-              <a:t> の過負荷 → 保護で遮断 → さらに次へ。2003 年の北米大停電はこの連鎖。</a:t>
-            </a:r>
-          </a:p>
-        </p:txBody>
-      </p:sp>
-      <p:sp>
-        <p:nvSpPr>
-          <p:cNvPr id="11" name="TextBox 10"/>
+            <a:r>
+              <a:rPr sz="1400">
+                <a:solidFill>
+                  <a:srgbClr val="71635B"/>
+                </a:solidFill>
+                <a:latin typeface="Avenir Next"/>
+                <a:ea typeface="Hiragino Sans"/>
+                <a:cs typeface="Hiragino Sans"/>
+              </a:rPr>
+              <a:t>並列の 2 回線は同じ母線 A・B をつなぐので電圧降下が等しい。よって I₁/I₂ = Z₂/Z₁。インピーダンスが小さい回線に多く流れる（逆比）。　出典｜コード/fig_ch02.py</a:t>
+            </a:r>
+          </a:p>
+        </p:txBody>
+      </p:sp>
+      <p:sp>
+        <p:nvSpPr>
+          <p:cNvPr id="5" name="TextBox 4"/>
           <p:cNvSpPr txBox="1"/>
           <p:nvPr/>
         </p:nvSpPr>
@@ -14423,59 +13159,14 @@
       <p:grpSpPr/>
       <p:sp>
         <p:nvSpPr>
-          <p:cNvPr id="2" name="TextBox 1"/>
+          <p:cNvPr id="2" name="edge:title"/>
           <p:cNvSpPr txBox="1"/>
           <p:nvPr/>
         </p:nvSpPr>
         <p:spPr>
           <a:xfrm>
-            <a:off x="566928" y="457200"/>
-            <a:ext cx="11057839" cy="658368"/>
-          </a:xfrm>
-          <a:prstGeom prst="rect">
-            <a:avLst/>
-          </a:prstGeom>
-          <a:noFill/>
-        </p:spPr>
-        <p:txBody>
-          <a:bodyPr wrap="square" lIns="0" rIns="0" tIns="0" bIns="0" anchor="ctr">
-            <a:noAutofit/>
-          </a:bodyPr>
-          <a:lstStyle/>
-          <a:p>
-            <a:pPr>
-              <a:lnSpc>
-                <a:spcPct val="106000"/>
-              </a:lnSpc>
-              <a:defRPr sz="3390" b="1">
-                <a:solidFill>
-                  <a:srgbClr val="7C332A"/>
-                </a:solidFill>
-                <a:latin typeface="Avenir Next"/>
-                <a:ea typeface="Hiragino Sans"/>
-                <a:cs typeface="Hiragino Sans"/>
-              </a:defRPr>
-            </a:pPr>
-            <a:r>
-              <a:rPr>
-                <a:ea typeface="Hiragino Sans"/>
-                <a:cs typeface="Hiragino Sans"/>
-              </a:rPr>
-              <a:t>導出 — 並列線路の分流は逆比で決まる</a:t>
-            </a:r>
-          </a:p>
-        </p:txBody>
-      </p:sp>
-      <p:sp>
-        <p:nvSpPr>
-          <p:cNvPr id="3" name="TextBox 2"/>
-          <p:cNvSpPr txBox="1"/>
-          <p:nvPr/>
-        </p:nvSpPr>
-        <p:spPr>
-          <a:xfrm>
-            <a:off x="566928" y="1920430"/>
-            <a:ext cx="11057839" cy="254000"/>
+            <a:off x="566928" y="146304"/>
+            <a:ext cx="11057839" cy="457200"/>
           </a:xfrm>
           <a:prstGeom prst="rect">
             <a:avLst/>
@@ -14488,30 +13179,60 @@
           </a:bodyPr>
           <a:lstStyle/>
           <a:p>
-            <a:r>
-              <a:rPr sz="1600" b="1">
-                <a:solidFill>
-                  <a:srgbClr val="5C7268"/>
-                </a:solidFill>
-                <a:latin typeface="Avenir Next"/>
-                <a:ea typeface="Hiragino Sans"/>
-                <a:cs typeface="Hiragino Sans"/>
-              </a:rPr>
-              <a:t>① 両端の電圧が共通｜Z₁ I₁ = Z₂ I₂</a:t>
-            </a:r>
-          </a:p>
-        </p:txBody>
-      </p:sp>
-      <p:sp>
-        <p:nvSpPr>
-          <p:cNvPr id="4" name="TextBox 3"/>
+            <a:pPr>
+              <a:defRPr sz="2400" b="1">
+                <a:solidFill>
+                  <a:srgbClr val="7C332A"/>
+                </a:solidFill>
+                <a:latin typeface="Avenir Next"/>
+                <a:ea typeface="Hiragino Sans"/>
+                <a:cs typeface="Hiragino Sans"/>
+              </a:defRPr>
+            </a:pPr>
+            <a:r>
+              <a:rPr>
+                <a:ea typeface="Hiragino Sans"/>
+                <a:cs typeface="Hiragino Sans"/>
+              </a:rPr>
+              <a:t>導出 — 並列線路の分流は逆比で決まる</a:t>
+            </a:r>
+          </a:p>
+        </p:txBody>
+      </p:sp>
+      <p:pic>
+        <p:nvPicPr>
+          <p:cNvPr id="3" name="Picture 2" descr="ch02_deriv_parallel_2.png"/>
+          <p:cNvPicPr>
+            <a:picLocks noChangeAspect="1"/>
+          </p:cNvPicPr>
+          <p:nvPr/>
+        </p:nvPicPr>
+        <p:blipFill>
+          <a:blip r:embed="rId2"/>
+          <a:stretch>
+            <a:fillRect/>
+          </a:stretch>
+        </p:blipFill>
+        <p:spPr>
+          <a:xfrm>
+            <a:off x="712618" y="713232"/>
+            <a:ext cx="10766458" cy="5322316"/>
+          </a:xfrm>
+          <a:prstGeom prst="rect">
+            <a:avLst/>
+          </a:prstGeom>
+        </p:spPr>
+      </p:pic>
+      <p:sp>
+        <p:nvSpPr>
+          <p:cNvPr id="4" name="edge:caption"/>
           <p:cNvSpPr txBox="1"/>
           <p:nvPr/>
         </p:nvSpPr>
         <p:spPr>
           <a:xfrm>
-            <a:off x="822960" y="2212530"/>
-            <a:ext cx="10801807" cy="695325"/>
+            <a:off x="228600" y="6090412"/>
+            <a:ext cx="11734495" cy="520700"/>
           </a:xfrm>
           <a:prstGeom prst="rect">
             <a:avLst/>
@@ -14524,358 +13245,24 @@
           </a:bodyPr>
           <a:lstStyle/>
           <a:p>
-            <a:pPr>
-              <a:lnSpc>
-                <a:spcPct val="130000"/>
-              </a:lnSpc>
-            </a:pPr>
-            <a:r>
-              <a:rPr sz="1500">
-                <a:solidFill>
-                  <a:srgbClr val="33221E"/>
-                </a:solidFill>
-                <a:latin typeface="Avenir Next"/>
-                <a:ea typeface="Hiragino Sans"/>
-                <a:cs typeface="Hiragino Sans"/>
-              </a:rPr>
-              <a:t>並列の 2 回線は同じ母線 A・B をつなぐので電圧降下が等しい。よって </a:t>
-            </a:r>
-            <a:r>
-              <a:rPr sz="1500" b="1">
-                <a:solidFill>
-                  <a:srgbClr val="33221E"/>
-                </a:solidFill>
-                <a:latin typeface="Avenir Next"/>
-                <a:ea typeface="Hiragino Sans"/>
-                <a:cs typeface="Hiragino Sans"/>
-              </a:rPr>
-              <a:t>I₁/I₂ = Z₂/Z₁</a:t>
-            </a:r>
-            <a:r>
-              <a:rPr sz="1500">
-                <a:solidFill>
-                  <a:srgbClr val="33221E"/>
-                </a:solidFill>
-                <a:latin typeface="Avenir Next"/>
-                <a:ea typeface="Hiragino Sans"/>
-                <a:cs typeface="Hiragino Sans"/>
-              </a:rPr>
-              <a:t>。インピーダンスが小さい回線に多く流れる（逆比）。</a:t>
-            </a:r>
-          </a:p>
-        </p:txBody>
-      </p:sp>
-      <p:sp>
-        <p:nvSpPr>
-          <p:cNvPr id="5" name="Rectangle 4"/>
-          <p:cNvSpPr/>
-          <p:nvPr/>
-        </p:nvSpPr>
-        <p:spPr>
-          <a:xfrm>
-            <a:off x="566928" y="3059747"/>
-            <a:ext cx="11057839" cy="9525"/>
-          </a:xfrm>
-          <a:prstGeom prst="rect">
-            <a:avLst/>
-          </a:prstGeom>
-          <a:solidFill>
-            <a:srgbClr val="E5DCCE"/>
-          </a:solidFill>
-          <a:ln>
-            <a:noFill/>
-          </a:ln>
-          <a:effectLst/>
-        </p:spPr>
-        <p:style>
-          <a:lnRef idx="1">
-            <a:schemeClr val="accent1"/>
-          </a:lnRef>
-          <a:fillRef idx="3">
-            <a:schemeClr val="accent1"/>
-          </a:fillRef>
-          <a:effectRef idx="2">
-            <a:schemeClr val="accent1"/>
-          </a:effectRef>
-          <a:fontRef idx="minor">
-            <a:schemeClr val="lt1"/>
-          </a:fontRef>
-        </p:style>
-        <p:txBody>
-          <a:bodyPr rtlCol="0" anchor="ctr"/>
-          <a:lstStyle/>
-          <a:p>
             <a:pPr algn="ctr"/>
-          </a:p>
-        </p:txBody>
-      </p:sp>
-      <p:sp>
-        <p:nvSpPr>
-          <p:cNvPr id="6" name="TextBox 5"/>
-          <p:cNvSpPr txBox="1"/>
-          <p:nvPr/>
-        </p:nvSpPr>
-        <p:spPr>
-          <a:xfrm>
-            <a:off x="566928" y="3237039"/>
-            <a:ext cx="11057839" cy="254000"/>
-          </a:xfrm>
-          <a:prstGeom prst="rect">
-            <a:avLst/>
-          </a:prstGeom>
-          <a:noFill/>
-        </p:spPr>
-        <p:txBody>
-          <a:bodyPr wrap="none" lIns="0" rIns="0" tIns="0" bIns="0">
-            <a:noAutofit/>
-          </a:bodyPr>
-          <a:lstStyle/>
-          <a:p>
-            <a:r>
-              <a:rPr sz="1600" b="1">
-                <a:solidFill>
-                  <a:srgbClr val="5C7268"/>
-                </a:solidFill>
-                <a:latin typeface="Avenir Next"/>
-                <a:ea typeface="Hiragino Sans"/>
-                <a:cs typeface="Hiragino Sans"/>
-              </a:rPr>
-              <a:t>② 全電流で割り付ける｜I₁ = I Z₂/(Z₁ + Z₂)</a:t>
-            </a:r>
-          </a:p>
-        </p:txBody>
-      </p:sp>
-      <p:sp>
-        <p:nvSpPr>
-          <p:cNvPr id="7" name="TextBox 6"/>
-          <p:cNvSpPr txBox="1"/>
-          <p:nvPr/>
-        </p:nvSpPr>
-        <p:spPr>
-          <a:xfrm>
-            <a:off x="822960" y="3529139"/>
-            <a:ext cx="10801807" cy="695325"/>
-          </a:xfrm>
-          <a:prstGeom prst="rect">
-            <a:avLst/>
-          </a:prstGeom>
-          <a:noFill/>
-        </p:spPr>
-        <p:txBody>
-          <a:bodyPr wrap="square" lIns="0" rIns="0" tIns="0" bIns="0">
-            <a:noAutofit/>
-          </a:bodyPr>
-          <a:lstStyle/>
-          <a:p>
-            <a:pPr>
-              <a:lnSpc>
-                <a:spcPct val="130000"/>
-              </a:lnSpc>
-            </a:pPr>
-            <a:r>
-              <a:rPr sz="1500">
-                <a:solidFill>
-                  <a:srgbClr val="33221E"/>
-                </a:solidFill>
-                <a:latin typeface="Avenir Next"/>
-                <a:ea typeface="Hiragino Sans"/>
-                <a:cs typeface="Hiragino Sans"/>
-              </a:rPr>
-              <a:t>Z₁ = 10 Ω、Z₂ = 15 Ω、I = 1,000 A なら I₁ = 1,000 × 15/25 = </a:t>
-            </a:r>
-            <a:r>
-              <a:rPr sz="1500" b="1">
-                <a:solidFill>
-                  <a:srgbClr val="33221E"/>
-                </a:solidFill>
-                <a:latin typeface="Avenir Next"/>
-                <a:ea typeface="Hiragino Sans"/>
-                <a:cs typeface="Hiragino Sans"/>
-              </a:rPr>
-              <a:t>600 A</a:t>
-            </a:r>
-            <a:r>
-              <a:rPr sz="1500">
-                <a:solidFill>
-                  <a:srgbClr val="33221E"/>
-                </a:solidFill>
-                <a:latin typeface="Avenir Next"/>
-                <a:ea typeface="Hiragino Sans"/>
-                <a:cs typeface="Hiragino Sans"/>
-              </a:rPr>
-              <a:t>、I₂ = </a:t>
-            </a:r>
-            <a:r>
-              <a:rPr sz="1500" b="1">
-                <a:solidFill>
-                  <a:srgbClr val="33221E"/>
-                </a:solidFill>
-                <a:latin typeface="Avenir Next"/>
-                <a:ea typeface="Hiragino Sans"/>
-                <a:cs typeface="Hiragino Sans"/>
-              </a:rPr>
-              <a:t>400 A</a:t>
-            </a:r>
-            <a:r>
-              <a:rPr sz="1500">
-                <a:solidFill>
-                  <a:srgbClr val="33221E"/>
-                </a:solidFill>
-                <a:latin typeface="Avenir Next"/>
-                <a:ea typeface="Hiragino Sans"/>
-                <a:cs typeface="Hiragino Sans"/>
-              </a:rPr>
-              <a:t>。運転者が選ぶのではなく、キルヒホッフが決める。</a:t>
-            </a:r>
-          </a:p>
-        </p:txBody>
-      </p:sp>
-      <p:sp>
-        <p:nvSpPr>
-          <p:cNvPr id="8" name="Rectangle 7"/>
-          <p:cNvSpPr/>
-          <p:nvPr/>
-        </p:nvSpPr>
-        <p:spPr>
-          <a:xfrm>
-            <a:off x="566928" y="4376356"/>
-            <a:ext cx="11057839" cy="9525"/>
-          </a:xfrm>
-          <a:prstGeom prst="rect">
-            <a:avLst/>
-          </a:prstGeom>
-          <a:solidFill>
-            <a:srgbClr val="E5DCCE"/>
-          </a:solidFill>
-          <a:ln>
-            <a:noFill/>
-          </a:ln>
-          <a:effectLst/>
-        </p:spPr>
-        <p:style>
-          <a:lnRef idx="1">
-            <a:schemeClr val="accent1"/>
-          </a:lnRef>
-          <a:fillRef idx="3">
-            <a:schemeClr val="accent1"/>
-          </a:fillRef>
-          <a:effectRef idx="2">
-            <a:schemeClr val="accent1"/>
-          </a:effectRef>
-          <a:fontRef idx="minor">
-            <a:schemeClr val="lt1"/>
-          </a:fontRef>
-        </p:style>
-        <p:txBody>
-          <a:bodyPr rtlCol="0" anchor="ctr"/>
-          <a:lstStyle/>
-          <a:p>
-            <a:pPr algn="ctr"/>
-          </a:p>
-        </p:txBody>
-      </p:sp>
-      <p:sp>
-        <p:nvSpPr>
-          <p:cNvPr id="9" name="build:ghost"/>
-          <p:cNvSpPr txBox="1"/>
-          <p:nvPr/>
-        </p:nvSpPr>
-        <p:spPr>
-          <a:xfrm>
-            <a:off x="566928" y="4553648"/>
-            <a:ext cx="11057839" cy="254000"/>
-          </a:xfrm>
-          <a:prstGeom prst="rect">
-            <a:avLst/>
-          </a:prstGeom>
-          <a:noFill/>
-        </p:spPr>
-        <p:txBody>
-          <a:bodyPr wrap="none" lIns="0" rIns="0" tIns="0" bIns="0">
-            <a:noAutofit/>
-          </a:bodyPr>
-          <a:lstStyle/>
-          <a:p>
-            <a:r>
-              <a:rPr sz="1600" b="1">
-                <a:solidFill>
-                  <a:srgbClr val="C1C9C5"/>
-                </a:solidFill>
-                <a:latin typeface="Avenir Next"/>
-                <a:ea typeface="Hiragino Sans"/>
-                <a:cs typeface="Hiragino Sans"/>
-              </a:rPr>
-              <a:t>③ 1 回線を失うと｜残りが全電流を負う</a:t>
-            </a:r>
-          </a:p>
-        </p:txBody>
-      </p:sp>
-      <p:sp>
-        <p:nvSpPr>
-          <p:cNvPr id="10" name="build:ghost"/>
-          <p:cNvSpPr txBox="1"/>
-          <p:nvPr/>
-        </p:nvSpPr>
-        <p:spPr>
-          <a:xfrm>
-            <a:off x="822960" y="4845748"/>
-            <a:ext cx="10801807" cy="695325"/>
-          </a:xfrm>
-          <a:prstGeom prst="rect">
-            <a:avLst/>
-          </a:prstGeom>
-          <a:noFill/>
-        </p:spPr>
-        <p:txBody>
-          <a:bodyPr wrap="square" lIns="0" rIns="0" tIns="0" bIns="0">
-            <a:noAutofit/>
-          </a:bodyPr>
-          <a:lstStyle/>
-          <a:p>
-            <a:pPr>
-              <a:lnSpc>
-                <a:spcPct val="130000"/>
-              </a:lnSpc>
-            </a:pPr>
-            <a:r>
-              <a:rPr sz="1500">
-                <a:solidFill>
-                  <a:srgbClr val="C1BCBB"/>
-                </a:solidFill>
-                <a:latin typeface="Avenir Next"/>
-                <a:ea typeface="Hiragino Sans"/>
-                <a:cs typeface="Hiragino Sans"/>
-              </a:rPr>
-              <a:t>回線 1 が開放されると I₂ = 1,000 A。定格 700 A なら </a:t>
-            </a:r>
-            <a:r>
-              <a:rPr sz="1500" b="1">
-                <a:solidFill>
-                  <a:srgbClr val="C1BCBB"/>
-                </a:solidFill>
-                <a:latin typeface="Avenir Next"/>
-                <a:ea typeface="Hiragino Sans"/>
-                <a:cs typeface="Hiragino Sans"/>
-              </a:rPr>
-              <a:t>143%</a:t>
-            </a:r>
-            <a:r>
-              <a:rPr sz="1500">
-                <a:solidFill>
-                  <a:srgbClr val="C1BCBB"/>
-                </a:solidFill>
-                <a:latin typeface="Avenir Next"/>
-                <a:ea typeface="Hiragino Sans"/>
-                <a:cs typeface="Hiragino Sans"/>
-              </a:rPr>
-              <a:t> の過負荷 → 保護で遮断 → さらに次へ。2003 年の北米大停電はこの連鎖。</a:t>
-            </a:r>
-          </a:p>
-        </p:txBody>
-      </p:sp>
-      <p:sp>
-        <p:nvSpPr>
-          <p:cNvPr id="11" name="TextBox 10"/>
+            <a:r>
+              <a:rPr sz="1400">
+                <a:solidFill>
+                  <a:srgbClr val="71635B"/>
+                </a:solidFill>
+                <a:latin typeface="Avenir Next"/>
+                <a:ea typeface="Hiragino Sans"/>
+                <a:cs typeface="Hiragino Sans"/>
+              </a:rPr>
+              <a:t>Z₁ = 10 Ω、Z₂ = 15 Ω、I = 1,000 A なら I₁ = 1,000 × 15/25 = 600 A、I₂ = 400 A。運転者が選ぶのではなく、キルヒホッフが決める。　出典｜コード/fig_ch02.py</a:t>
+            </a:r>
+          </a:p>
+        </p:txBody>
+      </p:sp>
+      <p:sp>
+        <p:nvSpPr>
+          <p:cNvPr id="5" name="TextBox 4"/>
           <p:cNvSpPr txBox="1"/>
           <p:nvPr/>
         </p:nvSpPr>
@@ -14931,59 +13318,14 @@
       <p:grpSpPr/>
       <p:sp>
         <p:nvSpPr>
-          <p:cNvPr id="2" name="TextBox 1"/>
+          <p:cNvPr id="2" name="edge:title"/>
           <p:cNvSpPr txBox="1"/>
           <p:nvPr/>
         </p:nvSpPr>
         <p:spPr>
           <a:xfrm>
-            <a:off x="566928" y="457200"/>
-            <a:ext cx="11057839" cy="658368"/>
-          </a:xfrm>
-          <a:prstGeom prst="rect">
-            <a:avLst/>
-          </a:prstGeom>
-          <a:noFill/>
-        </p:spPr>
-        <p:txBody>
-          <a:bodyPr wrap="square" lIns="0" rIns="0" tIns="0" bIns="0" anchor="ctr">
-            <a:noAutofit/>
-          </a:bodyPr>
-          <a:lstStyle/>
-          <a:p>
-            <a:pPr>
-              <a:lnSpc>
-                <a:spcPct val="106000"/>
-              </a:lnSpc>
-              <a:defRPr sz="3390" b="1">
-                <a:solidFill>
-                  <a:srgbClr val="7C332A"/>
-                </a:solidFill>
-                <a:latin typeface="Avenir Next"/>
-                <a:ea typeface="Hiragino Sans"/>
-                <a:cs typeface="Hiragino Sans"/>
-              </a:defRPr>
-            </a:pPr>
-            <a:r>
-              <a:rPr>
-                <a:ea typeface="Hiragino Sans"/>
-                <a:cs typeface="Hiragino Sans"/>
-              </a:rPr>
-              <a:t>導出 — 並列線路の分流は逆比で決まる</a:t>
-            </a:r>
-          </a:p>
-        </p:txBody>
-      </p:sp>
-      <p:sp>
-        <p:nvSpPr>
-          <p:cNvPr id="3" name="TextBox 2"/>
-          <p:cNvSpPr txBox="1"/>
-          <p:nvPr/>
-        </p:nvSpPr>
-        <p:spPr>
-          <a:xfrm>
-            <a:off x="566928" y="1920430"/>
-            <a:ext cx="11057839" cy="254000"/>
+            <a:off x="566928" y="146304"/>
+            <a:ext cx="11057839" cy="457200"/>
           </a:xfrm>
           <a:prstGeom prst="rect">
             <a:avLst/>
@@ -14996,30 +13338,60 @@
           </a:bodyPr>
           <a:lstStyle/>
           <a:p>
-            <a:r>
-              <a:rPr sz="1600" b="1">
-                <a:solidFill>
-                  <a:srgbClr val="5C7268"/>
-                </a:solidFill>
-                <a:latin typeface="Avenir Next"/>
-                <a:ea typeface="Hiragino Sans"/>
-                <a:cs typeface="Hiragino Sans"/>
-              </a:rPr>
-              <a:t>① 両端の電圧が共通｜Z₁ I₁ = Z₂ I₂</a:t>
-            </a:r>
-          </a:p>
-        </p:txBody>
-      </p:sp>
-      <p:sp>
-        <p:nvSpPr>
-          <p:cNvPr id="4" name="TextBox 3"/>
+            <a:pPr>
+              <a:defRPr sz="2400" b="1">
+                <a:solidFill>
+                  <a:srgbClr val="7C332A"/>
+                </a:solidFill>
+                <a:latin typeface="Avenir Next"/>
+                <a:ea typeface="Hiragino Sans"/>
+                <a:cs typeface="Hiragino Sans"/>
+              </a:defRPr>
+            </a:pPr>
+            <a:r>
+              <a:rPr>
+                <a:ea typeface="Hiragino Sans"/>
+                <a:cs typeface="Hiragino Sans"/>
+              </a:rPr>
+              <a:t>導出 — 並列線路の分流は逆比で決まる</a:t>
+            </a:r>
+          </a:p>
+        </p:txBody>
+      </p:sp>
+      <p:pic>
+        <p:nvPicPr>
+          <p:cNvPr id="3" name="Picture 2" descr="ch02_deriv_parallel_3.png"/>
+          <p:cNvPicPr>
+            <a:picLocks noChangeAspect="1"/>
+          </p:cNvPicPr>
+          <p:nvPr/>
+        </p:nvPicPr>
+        <p:blipFill>
+          <a:blip r:embed="rId2"/>
+          <a:stretch>
+            <a:fillRect/>
+          </a:stretch>
+        </p:blipFill>
+        <p:spPr>
+          <a:xfrm>
+            <a:off x="712618" y="713232"/>
+            <a:ext cx="10766458" cy="5322316"/>
+          </a:xfrm>
+          <a:prstGeom prst="rect">
+            <a:avLst/>
+          </a:prstGeom>
+        </p:spPr>
+      </p:pic>
+      <p:sp>
+        <p:nvSpPr>
+          <p:cNvPr id="4" name="edge:caption"/>
           <p:cNvSpPr txBox="1"/>
           <p:nvPr/>
         </p:nvSpPr>
         <p:spPr>
           <a:xfrm>
-            <a:off x="822960" y="2212530"/>
-            <a:ext cx="10801807" cy="695325"/>
+            <a:off x="228600" y="6090412"/>
+            <a:ext cx="11734495" cy="520700"/>
           </a:xfrm>
           <a:prstGeom prst="rect">
             <a:avLst/>
@@ -15032,358 +13404,24 @@
           </a:bodyPr>
           <a:lstStyle/>
           <a:p>
-            <a:pPr>
-              <a:lnSpc>
-                <a:spcPct val="130000"/>
-              </a:lnSpc>
-            </a:pPr>
-            <a:r>
-              <a:rPr sz="1500">
-                <a:solidFill>
-                  <a:srgbClr val="33221E"/>
-                </a:solidFill>
-                <a:latin typeface="Avenir Next"/>
-                <a:ea typeface="Hiragino Sans"/>
-                <a:cs typeface="Hiragino Sans"/>
-              </a:rPr>
-              <a:t>並列の 2 回線は同じ母線 A・B をつなぐので電圧降下が等しい。よって </a:t>
-            </a:r>
-            <a:r>
-              <a:rPr sz="1500" b="1">
-                <a:solidFill>
-                  <a:srgbClr val="33221E"/>
-                </a:solidFill>
-                <a:latin typeface="Avenir Next"/>
-                <a:ea typeface="Hiragino Sans"/>
-                <a:cs typeface="Hiragino Sans"/>
-              </a:rPr>
-              <a:t>I₁/I₂ = Z₂/Z₁</a:t>
-            </a:r>
-            <a:r>
-              <a:rPr sz="1500">
-                <a:solidFill>
-                  <a:srgbClr val="33221E"/>
-                </a:solidFill>
-                <a:latin typeface="Avenir Next"/>
-                <a:ea typeface="Hiragino Sans"/>
-                <a:cs typeface="Hiragino Sans"/>
-              </a:rPr>
-              <a:t>。インピーダンスが小さい回線に多く流れる（逆比）。</a:t>
-            </a:r>
-          </a:p>
-        </p:txBody>
-      </p:sp>
-      <p:sp>
-        <p:nvSpPr>
-          <p:cNvPr id="5" name="Rectangle 4"/>
-          <p:cNvSpPr/>
-          <p:nvPr/>
-        </p:nvSpPr>
-        <p:spPr>
-          <a:xfrm>
-            <a:off x="566928" y="3059747"/>
-            <a:ext cx="11057839" cy="9525"/>
-          </a:xfrm>
-          <a:prstGeom prst="rect">
-            <a:avLst/>
-          </a:prstGeom>
-          <a:solidFill>
-            <a:srgbClr val="E5DCCE"/>
-          </a:solidFill>
-          <a:ln>
-            <a:noFill/>
-          </a:ln>
-          <a:effectLst/>
-        </p:spPr>
-        <p:style>
-          <a:lnRef idx="1">
-            <a:schemeClr val="accent1"/>
-          </a:lnRef>
-          <a:fillRef idx="3">
-            <a:schemeClr val="accent1"/>
-          </a:fillRef>
-          <a:effectRef idx="2">
-            <a:schemeClr val="accent1"/>
-          </a:effectRef>
-          <a:fontRef idx="minor">
-            <a:schemeClr val="lt1"/>
-          </a:fontRef>
-        </p:style>
-        <p:txBody>
-          <a:bodyPr rtlCol="0" anchor="ctr"/>
-          <a:lstStyle/>
-          <a:p>
             <a:pPr algn="ctr"/>
-          </a:p>
-        </p:txBody>
-      </p:sp>
-      <p:sp>
-        <p:nvSpPr>
-          <p:cNvPr id="6" name="TextBox 5"/>
-          <p:cNvSpPr txBox="1"/>
-          <p:nvPr/>
-        </p:nvSpPr>
-        <p:spPr>
-          <a:xfrm>
-            <a:off x="566928" y="3237039"/>
-            <a:ext cx="11057839" cy="254000"/>
-          </a:xfrm>
-          <a:prstGeom prst="rect">
-            <a:avLst/>
-          </a:prstGeom>
-          <a:noFill/>
-        </p:spPr>
-        <p:txBody>
-          <a:bodyPr wrap="none" lIns="0" rIns="0" tIns="0" bIns="0">
-            <a:noAutofit/>
-          </a:bodyPr>
-          <a:lstStyle/>
-          <a:p>
-            <a:r>
-              <a:rPr sz="1600" b="1">
-                <a:solidFill>
-                  <a:srgbClr val="5C7268"/>
-                </a:solidFill>
-                <a:latin typeface="Avenir Next"/>
-                <a:ea typeface="Hiragino Sans"/>
-                <a:cs typeface="Hiragino Sans"/>
-              </a:rPr>
-              <a:t>② 全電流で割り付ける｜I₁ = I Z₂/(Z₁ + Z₂)</a:t>
-            </a:r>
-          </a:p>
-        </p:txBody>
-      </p:sp>
-      <p:sp>
-        <p:nvSpPr>
-          <p:cNvPr id="7" name="TextBox 6"/>
-          <p:cNvSpPr txBox="1"/>
-          <p:nvPr/>
-        </p:nvSpPr>
-        <p:spPr>
-          <a:xfrm>
-            <a:off x="822960" y="3529139"/>
-            <a:ext cx="10801807" cy="695325"/>
-          </a:xfrm>
-          <a:prstGeom prst="rect">
-            <a:avLst/>
-          </a:prstGeom>
-          <a:noFill/>
-        </p:spPr>
-        <p:txBody>
-          <a:bodyPr wrap="square" lIns="0" rIns="0" tIns="0" bIns="0">
-            <a:noAutofit/>
-          </a:bodyPr>
-          <a:lstStyle/>
-          <a:p>
-            <a:pPr>
-              <a:lnSpc>
-                <a:spcPct val="130000"/>
-              </a:lnSpc>
-            </a:pPr>
-            <a:r>
-              <a:rPr sz="1500">
-                <a:solidFill>
-                  <a:srgbClr val="33221E"/>
-                </a:solidFill>
-                <a:latin typeface="Avenir Next"/>
-                <a:ea typeface="Hiragino Sans"/>
-                <a:cs typeface="Hiragino Sans"/>
-              </a:rPr>
-              <a:t>Z₁ = 10 Ω、Z₂ = 15 Ω、I = 1,000 A なら I₁ = 1,000 × 15/25 = </a:t>
-            </a:r>
-            <a:r>
-              <a:rPr sz="1500" b="1">
-                <a:solidFill>
-                  <a:srgbClr val="33221E"/>
-                </a:solidFill>
-                <a:latin typeface="Avenir Next"/>
-                <a:ea typeface="Hiragino Sans"/>
-                <a:cs typeface="Hiragino Sans"/>
-              </a:rPr>
-              <a:t>600 A</a:t>
-            </a:r>
-            <a:r>
-              <a:rPr sz="1500">
-                <a:solidFill>
-                  <a:srgbClr val="33221E"/>
-                </a:solidFill>
-                <a:latin typeface="Avenir Next"/>
-                <a:ea typeface="Hiragino Sans"/>
-                <a:cs typeface="Hiragino Sans"/>
-              </a:rPr>
-              <a:t>、I₂ = </a:t>
-            </a:r>
-            <a:r>
-              <a:rPr sz="1500" b="1">
-                <a:solidFill>
-                  <a:srgbClr val="33221E"/>
-                </a:solidFill>
-                <a:latin typeface="Avenir Next"/>
-                <a:ea typeface="Hiragino Sans"/>
-                <a:cs typeface="Hiragino Sans"/>
-              </a:rPr>
-              <a:t>400 A</a:t>
-            </a:r>
-            <a:r>
-              <a:rPr sz="1500">
-                <a:solidFill>
-                  <a:srgbClr val="33221E"/>
-                </a:solidFill>
-                <a:latin typeface="Avenir Next"/>
-                <a:ea typeface="Hiragino Sans"/>
-                <a:cs typeface="Hiragino Sans"/>
-              </a:rPr>
-              <a:t>。運転者が選ぶのではなく、キルヒホッフが決める。</a:t>
-            </a:r>
-          </a:p>
-        </p:txBody>
-      </p:sp>
-      <p:sp>
-        <p:nvSpPr>
-          <p:cNvPr id="8" name="Rectangle 7"/>
-          <p:cNvSpPr/>
-          <p:nvPr/>
-        </p:nvSpPr>
-        <p:spPr>
-          <a:xfrm>
-            <a:off x="566928" y="4376356"/>
-            <a:ext cx="11057839" cy="9525"/>
-          </a:xfrm>
-          <a:prstGeom prst="rect">
-            <a:avLst/>
-          </a:prstGeom>
-          <a:solidFill>
-            <a:srgbClr val="E5DCCE"/>
-          </a:solidFill>
-          <a:ln>
-            <a:noFill/>
-          </a:ln>
-          <a:effectLst/>
-        </p:spPr>
-        <p:style>
-          <a:lnRef idx="1">
-            <a:schemeClr val="accent1"/>
-          </a:lnRef>
-          <a:fillRef idx="3">
-            <a:schemeClr val="accent1"/>
-          </a:fillRef>
-          <a:effectRef idx="2">
-            <a:schemeClr val="accent1"/>
-          </a:effectRef>
-          <a:fontRef idx="minor">
-            <a:schemeClr val="lt1"/>
-          </a:fontRef>
-        </p:style>
-        <p:txBody>
-          <a:bodyPr rtlCol="0" anchor="ctr"/>
-          <a:lstStyle/>
-          <a:p>
-            <a:pPr algn="ctr"/>
-          </a:p>
-        </p:txBody>
-      </p:sp>
-      <p:sp>
-        <p:nvSpPr>
-          <p:cNvPr id="9" name="TextBox 8"/>
-          <p:cNvSpPr txBox="1"/>
-          <p:nvPr/>
-        </p:nvSpPr>
-        <p:spPr>
-          <a:xfrm>
-            <a:off x="566928" y="4553648"/>
-            <a:ext cx="11057839" cy="254000"/>
-          </a:xfrm>
-          <a:prstGeom prst="rect">
-            <a:avLst/>
-          </a:prstGeom>
-          <a:noFill/>
-        </p:spPr>
-        <p:txBody>
-          <a:bodyPr wrap="none" lIns="0" rIns="0" tIns="0" bIns="0">
-            <a:noAutofit/>
-          </a:bodyPr>
-          <a:lstStyle/>
-          <a:p>
-            <a:r>
-              <a:rPr sz="1600" b="1">
-                <a:solidFill>
-                  <a:srgbClr val="5C7268"/>
-                </a:solidFill>
-                <a:latin typeface="Avenir Next"/>
-                <a:ea typeface="Hiragino Sans"/>
-                <a:cs typeface="Hiragino Sans"/>
-              </a:rPr>
-              <a:t>③ 1 回線を失うと｜残りが全電流を負う</a:t>
-            </a:r>
-          </a:p>
-        </p:txBody>
-      </p:sp>
-      <p:sp>
-        <p:nvSpPr>
-          <p:cNvPr id="10" name="TextBox 9"/>
-          <p:cNvSpPr txBox="1"/>
-          <p:nvPr/>
-        </p:nvSpPr>
-        <p:spPr>
-          <a:xfrm>
-            <a:off x="822960" y="4845748"/>
-            <a:ext cx="10801807" cy="695325"/>
-          </a:xfrm>
-          <a:prstGeom prst="rect">
-            <a:avLst/>
-          </a:prstGeom>
-          <a:noFill/>
-        </p:spPr>
-        <p:txBody>
-          <a:bodyPr wrap="square" lIns="0" rIns="0" tIns="0" bIns="0">
-            <a:noAutofit/>
-          </a:bodyPr>
-          <a:lstStyle/>
-          <a:p>
-            <a:pPr>
-              <a:lnSpc>
-                <a:spcPct val="130000"/>
-              </a:lnSpc>
-            </a:pPr>
-            <a:r>
-              <a:rPr sz="1500">
-                <a:solidFill>
-                  <a:srgbClr val="33221E"/>
-                </a:solidFill>
-                <a:latin typeface="Avenir Next"/>
-                <a:ea typeface="Hiragino Sans"/>
-                <a:cs typeface="Hiragino Sans"/>
-              </a:rPr>
-              <a:t>回線 1 が開放されると I₂ = 1,000 A。定格 700 A なら </a:t>
-            </a:r>
-            <a:r>
-              <a:rPr sz="1500" b="1">
-                <a:solidFill>
-                  <a:srgbClr val="33221E"/>
-                </a:solidFill>
-                <a:latin typeface="Avenir Next"/>
-                <a:ea typeface="Hiragino Sans"/>
-                <a:cs typeface="Hiragino Sans"/>
-              </a:rPr>
-              <a:t>143%</a:t>
-            </a:r>
-            <a:r>
-              <a:rPr sz="1500">
-                <a:solidFill>
-                  <a:srgbClr val="33221E"/>
-                </a:solidFill>
-                <a:latin typeface="Avenir Next"/>
-                <a:ea typeface="Hiragino Sans"/>
-                <a:cs typeface="Hiragino Sans"/>
-              </a:rPr>
-              <a:t> の過負荷 → 保護で遮断 → さらに次へ。2003 年の北米大停電はこの連鎖。</a:t>
-            </a:r>
-          </a:p>
-        </p:txBody>
-      </p:sp>
-      <p:sp>
-        <p:nvSpPr>
-          <p:cNvPr id="11" name="TextBox 10"/>
+            <a:r>
+              <a:rPr sz="1400">
+                <a:solidFill>
+                  <a:srgbClr val="71635B"/>
+                </a:solidFill>
+                <a:latin typeface="Avenir Next"/>
+                <a:ea typeface="Hiragino Sans"/>
+                <a:cs typeface="Hiragino Sans"/>
+              </a:rPr>
+              <a:t>回線 1 が開放されると I₂ = 1,000 A。定格 700 A なら 143% の過負荷 → 保護で遮断 → さらに次へ。2003 年の北米大停電はこの連鎖。　出典｜コード/fig_ch02.py</a:t>
+            </a:r>
+          </a:p>
+        </p:txBody>
+      </p:sp>
+      <p:sp>
+        <p:nvSpPr>
+          <p:cNvPr id="5" name="TextBox 4"/>
           <p:cNvSpPr txBox="1"/>
           <p:nvPr/>
         </p:nvSpPr>
